--- a/session-7/deck/MOI_Builders_S7-new.pptx
+++ b/session-7/deck/MOI_Builders_S7-new.pptx
@@ -606,7 +606,7 @@
 because the word gets used loosely.
 The first is a Signal Desk. It sells probability estimates on bitcoin — will BTC draw down
 more than 20% this quarter, will it close higher next week. Two things make it an agent
-rather than an API: it decides what to charge for each answer, and it can decline.
+rather than an API: it prices every request itself, inside bounds it enforces.
 The second is a Risk Agent. It's the buyer. It has a question and it doesn't know the answer.
 It decides which market answers its question, and whether the price is worth paying.
 Here's the important part — they have never met. No account, no API key, no contract.
@@ -2964,7 +2964,7 @@
                 <a:ea typeface="Inter" pitchFamily="34" charset="-122"/>
                 <a:cs typeface="Inter" pitchFamily="34" charset="-120"/>
               </a:rPr>
-              <a:t>Can decline the sale</a:t>
+              <a:t>Sets its own price, per request</a:t>
             </a:r>
             <a:endParaRPr lang="en-US" sz="1250" dirty="0"/>
           </a:p>

--- a/session-7/deck/MOI_Builders_S7-new.pptx
+++ b/session-7/deck/MOI_Builders_S7-new.pptx
@@ -509,11 +509,14 @@
           <a:p>
             <a:r>
               <a:rPr lang="en-US" dirty="0"/>
-              <a:t>[ SCREEN — DECK ]
-Open cold. Don't read the slide.
-"Two programs. One sells probability estimates on bitcoin. The other needs one.
-They have never met — no account, no API key, no contract. Watch them do business."
-Then straight to slide 2 and talk over the diagram.</a:t>
+              <a:t>[ DECK · slide 1 ]  Open cold. Do not read the slide.
+Two programs. One of them sells probability estimates on bitcoin. The other one has a question it
+can't answer for itself.
+They have never met. No account, no API key, nobody introduced them.
+In about thirty seconds, one of them is going to find the other, decide it's legitimate, and pay
+it — and the only thing I'll touch is the keyboard, once, at the start.
+Let's meet them properly.
+[ next slide ]</a:t>
             </a:r>
             <a:endParaRPr lang="en-US" dirty="0"/>
           </a:p>
@@ -601,20 +604,26 @@
           <a:p>
             <a:r>
               <a:rPr lang="en-US" dirty="0"/>
-              <a:t>[ SCREEN — DECK ]  Stay here. This is the whole setup — nothing to click.
-"I've got two programs running. I'm going to call them agents, and I want to be precise,
-because the word gets used loosely.
-The first is a Signal Desk. It sells probability estimates on bitcoin — will BTC draw down
-more than 20% this quarter, will it close higher next week. Two things make it an agent
-rather than an API: it prices every request itself, inside bounds it enforces.
-The second is a Risk Agent. It's the buyer. It has a question and it doesn't know the answer.
-It decides which market answers its question, and whether the price is worth paying.
-Here's the important part — they have never met. No account, no API key, no contract.
-The buyer doesn't have the seller's address, doesn't have its URL, doesn't know it exists.
-The one thing they share is the bottom of this slide: both are registered on MOI, and the
-asset they settle in is native to it."
-DON'T say "two AI agents transacting autonomously" beyond what's on the slide — the seller's
-product is a stub and someone will ask.</a:t>
+              <a:t>[ DECK · slide 2 ]  Stay here. This is the whole setup. Nothing to click.
+Let me introduce them properly, because I'm going to keep calling these agents and that word gets
+thrown around.
+On the left, the Risk Agent. It's the buyer. It has a question, it can't answer it, and it has a
+wallet. Two things make it an agent and not a script: it works out which market actually answers
+its question, and it decides whether the price it gets quoted is worth paying.
+On the right, the Signal Desk. It sells probability estimates. Will bitcoin draw down more than
+twenty percent this quarter. Will it close higher next week. And here's the part I like — it sets
+its own price, per request. That number is not sitting in a config file somewhere. The desk decides
+it, every single time you ask.
+[ pause — then point at the gap in the middle ]
+Now the important bit.
+The buyer does not have the seller's address. It doesn't have its URL. It doesn't know it exists.
+There's no shared secret, no contract, nobody signed up for anything.
+The only thing these two have in common is that strip along the bottom. They're both registered on
+MOI, and the money they'll settle in is native to it. That's the entire relationship.
+So — how does one of them pay the other?
+[ CAREFUL: the seller sets its price, it does not decline a sale. Refusing isn't implemented.
+  Don't claim "two AI agents transacting autonomously" beyond what's on the slide — the seller's
+  product is a stub and someone will ask. ]</a:t>
             </a:r>
             <a:endParaRPr lang="en-US" dirty="0"/>
           </a:p>
@@ -702,17 +711,21 @@
           <a:p>
             <a:r>
               <a:rPr lang="en-US" dirty="0"/>
-              <a:t>[ SCREEN — DECK ]
-"The hard part isn't moving money — chains have done that for fifteen years.
-The hard part is that when you pay a stranger, a human does three things without thinking.
-Glances at whether the shop is real. Knows roughly what they're willing to spend. Assumes
-there's recourse if nothing arrives.
-Take the human out and none of those happen by default. And you have to take the human out,
-because you can't approve a fraction-of-a-cent purchase by hand — the approval costs more
-than the thing.
-So each of those instincts has to become something a machine can check. Today is the first
-one: how do you know who you're paying?"
-&gt;&gt;&gt; SWITCH TO BROWSER after this slide.</a:t>
+              <a:t>[ DECK · slide 3 ]
+Moving money is the easy part. Chains have been doing that for the better part of two decades.
+The hard part is what you do without thinking, every single time you buy something from someone
+you've never met.
+You glance at the shop and decide it looks real. You've got a rough number in your head that you
+won't go past. And you assume that if nothing turns up, there's some way to get your money back.
+Three instincts. You don't even notice you're using them.
+[ pause ]
+Take the human out and every one of them disappears. And you do have to take the human out —
+you can't approve a fraction-of-a-cent purchase by hand. The clicking costs more than the thing
+you're buying.
+So each of those instincts has to become something a machine can actually check. Three questions.
+Three sessions. Today is the first one.
+How do you know who you're paying?
+[ &gt;&gt;&gt; SWITCH TO BROWSER — http://localhost:4000 ]</a:t>
             </a:r>
             <a:endParaRPr lang="en-US" dirty="0"/>
           </a:p>
@@ -800,25 +813,72 @@
           <a:p>
             <a:r>
               <a:rPr lang="en-US" dirty="0"/>
-              <a:t>&gt;&gt;&gt; SWITCH TO TERMINAL / BROWSER — http://localhost:4000
-Leave this slide up while you switch.
-HAPPY PATH — type: should i be worried about a crash
-  step 1  "admits it can't answer" — scans for the skill tag sells-signals
-  step 2  agent id, registered wallet, service URL, advertised skills — ALL off chain.
-          "I never gave it that URL."
-  step 3  catalog is free — questions public, answers paid
-  step 4  check "decided by" shows the model. "crash" isn't in the catalog; it says "draw down"
-  step 5  HTTP 402 — reserved since 1997. Seller says WHY it charges this.
-  step 6  "3 USDM — I'll pay that" — the BUYER's call. Two agents, two decisions.
-  step 7  ** SLOW DOWN ** the identity check. payTo is 32 bytes: it says WHERE, not WHOSE.
-  step 8  real interaction hash — CLICK IT to copy, paste into voyage.moi.technology
-  step 9  seven checks, all read-only, seller reads the chain itself
-  step 10 answer appears, balance drops by 3
-SAY OUT LOUD: the probabilities are made up. No model, no market data.
-REFUSAL — tick "Simulate a compromised listing", ask again.
-  Stops at step 7. "Money moved: none" is literal — no transaction was ever built.
-  The party with something to lose is the one that checked.
-If the happy path refuses: you Ctrl-C'd a tamper run. Rerun --tamper and let it finish.</a:t>
+              <a:t>[ &gt;&gt;&gt; BROWSER — http://localhost:4000 ]  Leave this slide up while you switch.
+I'm going to type what I want, in plain language. Watch what I don't do. I don't name a seller, I
+don't name a price, and I don't give it an address.
+[ TYPE: should i be worried about a crash ]
+— 1 · "I don't know the answer to this" —
+First thing it does is admit it's stuck. That's the honest starting point for any agent: I can't
+answer this, so who can? And notice it isn't looking for a company. It's looking for a skill.
+— 2 · "Found one" —
+There. One agent came back, and look at everything that came with it. An id, the wallet it
+registered, the URL where it lives, the skills it advertises. All of that came off the chain.
+I never gave it that address. I gave it a question.
+— 3 · "Here is what I sell" —
+Now it's reading the catalog, and the catalog is free. The questions are public — you only pay for
+the answers. That's deliberate. If browsing cost money, you couldn't work out what you wanted
+without paying to find out.
+— 4 · "This is the one I want" —
+It went for the drawdown market. Look at "decided by" — that's a model, reasoning. And worth
+noticing: I typed the word "crash". That word appears nowhere in the catalog. The market says
+"draw down". Keyword matching would have missed it.
+— 5 · "402 Payment Required" —
+Four-oh-two. Payment Required. It's been sitting in the HTTP spec since 1997, essentially unused,
+because until recently nothing needed to charge a machine for a single request. And notice the desk
+tells me why it's charging this. That's its own pricing decision, not a lookup.
+— 6 · "3 USDM — I'll pay that" —
+And the buyer decides whether that's fair. Two agents, two decisions, one transaction. If the desk
+had marked this up hard, you'd be watching the buyer walk away instead.
+— 7 · "Checked who I am paying" —  ** SLOW DOWN. THIS IS THE SESSION. **
+Here's the thing I actually want you to leave with.
+That address in the quote is thirty-two bytes. It tells you where to send money. It tells you
+absolutely nothing about whose address it is.
+No payment protocol can help you here. That's not what they're for. They move value; they don't
+vouch for people.
+[ pause ]
+So before it spends anything, the agent goes back to the chain and asks a different question: is
+this actually the wallet that this agent registered? It matches. Now it'll pay.
+That check takes about a second, and it happens before the money moves — not after. That ordering
+is the whole security property. There's no escrow here and nothing to claw back, so a check that
+runs late may as well not run at all.
+— 8 · "Paid — on chain, from my own wallet" —
+Money's moved. Real transfer, real interaction hash.
+[ point at the green value next to "interaction" — click it, it copies ]
+That is not a receipt I printed for myself. That interaction is on devnet whether or not you
+believe a single thing on this screen. Paste it into an explorer and it's there.
+And read the wording — from my own wallet. On MOI, only the owner can move their own funds. Nobody
+is holding this money on anyone's behalf, because nobody can.
+— 9 · "I checked your payment myself" —
+Seven checks. And the seller isn't taking the buyer's word for any of it. It goes and reads that
+interaction off the chain and decodes it. Right sender, right recipient, right amount, not already
+spent. Same hash at the bottom — the seller independently arrived at the transaction the buyer
+claimed.
+— 10 · the answer —
+Paid. Delivered. Balance at the top dropped by three.
+One thing I want to say plainly, because it's a number about bitcoin and those get screenshotted.
+That probability is made up. There's no model behind it and no market data. Every response says so.
+Today is about the payment, not the forecast.
+=== THE REFUSAL — tick "Simulate a compromised listing", ask the same thing again ===
+Now let's break it. I've repointed the seller's registry entry at an attacker — as if someone got
+into the listing and swapped the payout address. The seller itself hasn't changed. It's still going
+to ask to be paid at its real address. Watch.
+[ it stops at step 7 ]
+Stopped. The registry says one thing, the quote says another, and it walked.
+Money moved: none. And that's literal, not a friendly message. It never built a transaction. There
+is nothing to reverse, because nothing happened.
+[ let it sit ]
+And notice who caught it. Not the seller. Not a middleman. The one with something to lose.
+[ IF THE HAPPY PATH REFUSES: you Ctrl-C'd a tamper run earlier. Rerun it and let it finish. ]</a:t>
             </a:r>
             <a:endParaRPr lang="en-US" dirty="0"/>
           </a:p>
@@ -906,24 +966,50 @@
           <a:p>
             <a:r>
               <a:rPr lang="en-US" dirty="0"/>
-              <a:t>&gt;&gt;&gt; SWITCH TO EDITOR
-payment-proof.ts — "Two messages. The seller sends a Quote: price, asset, where to pay, and its
-agent id. The buyer sends back a Claim: I sent this much, to you, in this transaction, for this
-thing, signed." Point at payToAgentId — without it, payTo is anonymous bytes.
-identity-check.ts — WHOLE FILE ON SCREEN, 42 lines, don't scroll. Point at ONE line:
-  if (normalizeAddress(registryWallet) !== normalizeAddress(quote.payTo))
-"Read the registered wallet off the chain. Compare it to the invoice. Refuse if they disagree.
-No payment protocol can answer that on its own — it needs an identity both parties can check."
-Then: it runs BEFORE the transfer. No escrow, nothing to claw back.
-verify-proof.ts — show two of seven.
-  check 3 key_binds_to_payer: "transfers are public. what stops someone quoting MY hash and
-  collecting the answer I paid for? this."
-  check 6 transfer_landed_on_chain: "the seller reads the interaction itself and decodes it."
-  Optional: npm run attack-test — 11 forgeries, each rejected for the RIGHT reason.
-pricing.ts + worth.ts — "the seller decides what to charge, the buyer decides if it's worth it.
-Both are model calls. But the price bounds are arithmetic, the buyer's hard ceiling is checked
-BEFORE the model is asked — the seller's pitch is untrusted text — and nothing about whether a
-payment is VALID touches a model at all."</a:t>
+              <a:t>[ &gt;&gt;&gt; EDITOR ]
+Four files. Everything that makes this safe is in them, and nowhere else.
+— payment-proof.ts —
+The entire wire format is two messages. The seller sends a Quote: here's my price, here's the
+asset, here's where to pay, and here's my agent id. The buyer sends back a Claim: I sent this much,
+to you, in this transaction, for this thing, and here's my signature over all of it.
+That's the protocol. No third service, nothing to negotiate.
+[ point at payToAgentId ]
+And that field is why any of this works. Take it away and payTo is thirty-two anonymous bytes
+again.
+— identity-check.ts —  [ whole file on screen, 42 lines, don't scroll ]
+This is the idea the entire session is built on, and it's forty-two lines.
+[ point at the one line: if (normalizeAddress(registryWallet) !== normalizeAddress(quote.payTo)) ]
+Read the wallet this agent registered. Compare it to the one on the invoice. Refuse if they
+disagree.
+That's it. That's the check no payment protocol can do for you, because it needs an identity that
+lives somewhere both parties can go and look — independently, without having to ask each other.
+[ then show where approve() is called in pay.ts ]
+And this is where it runs. Before the transfer. Not after, not alongside — before. The payment
+client is physically incapable of spending until this returns a yes.
+— verify-proof.ts —  [ show two of the seven, don't read them all ]
+Check three, key binds to payer. Transfers are public. Anyone watching the chain can see that
+payment land. So what stops someone else grabbing my transaction hash, claiming it, and walking off
+with the answer I paid for? This. The claim is signed, and this check derives the account id back
+out of the public key. You cannot claim a payment you didn't make.
+Check six, transfer landed on chain. This is the seller doing the work itself — pulling the
+interaction, decoding the calldata, checking sender and recipient and amount. That's the cost of
+having no middleman. There's nobody to ask, so you look it up yourself.
+[ OPTIONAL — run: npm run attack-test ]
+Eleven forged payments. Every one rejected, and rejected for the right reason. Plus one honest
+payment that has to be accepted, because a verifier that refuses everything would otherwise look
+perfect.
+— pricing.ts and worth.ts —
+These two are why I'm comfortable calling both of these agents. The desk decides what to charge.
+The buyer decides whether to pay it. Both of those are model calls.
+But look very carefully at what the model is not allowed to touch.
+[ point at the clamp in pricing.ts, then SOFT_LIMIT in worth.ts ]
+The price bounds are arithmetic. The buyer's hard ceiling is checked before the model is even
+asked — and that matters, because the seller's justification for its price goes straight into the
+buyer's prompt. That's untrusted text, written by the counterparty.
+A model can be talked into things. That's a wonderful property when you're choosing what to buy,
+and a disqualifying one when you're guarding a wallet.
+And nothing about whether a payment is valid goes near a model at all. That's arithmetic and
+signatures.</a:t>
             </a:r>
             <a:endParaRPr lang="en-US" dirty="0"/>
           </a:p>
@@ -1011,21 +1097,28 @@
           <a:p>
             <a:r>
               <a:rPr lang="en-US" dirty="0"/>
-              <a:t>[ SCREEN — DECK ]  — but run the command in the terminal first.
-&gt;&gt;&gt; TERMINAL:  MAX_PRICE_PER_ANSWER=999999 npm run ask -- "should i be worried about a crash"
-"The buyer has a spending limit. It refuses anything over six. Let me show you what that's worth.
-I didn't touch the code — I set an environment variable and the hard limit is gone.
-Now, it still won't pay something absurd, because there's a second check: the model's own
-judgment about whether a markup is reasonable. But look where that lives. It's ALSO inside the
-agent. A prompt I wrote, in a file I control, in a process I'm running.
-That's the point. Every guardrail here is self-imposed."
-Then the right-hand card — this is the one that surprises people:
-"And it's worse than that. That limit is per purchase. Nothing tracks the total. An agent with
-a six-unit limit and a ninety-nine-thousand balance can spend all of it, six at a time, without
-ever violating its limit once.
-Nothing on the chain caps this wallet. It spent three because it decided to."
-DON'T claim the env var makes it pay anything — tested, the model still refuses. Say the honest
-version: both guardrails are inside the agent.</a:t>
+              <a:t>[ DECK · slide 6 ]  — but run the command in the terminal first.
+[ &gt;&gt;&gt; TERMINAL: MAX_PRICE_PER_ANSWER=999999 npm run ask -- "should i be worried about a crash" ]
+So the buyer has a spending limit. It refuses anything over six. Let me show you exactly what that
+is worth.
+I didn't touch the code. I set an environment variable, and the limit is gone.
+Now — it still won't pay something ridiculous, because there's a second opinion: the model's own
+read on whether a markup is reasonable. But look where that lives. Same process. It's a prompt I
+wrote, in a file I control.
+[ pause ]
+That's the point. Every guardrail in this demo is self-imposed. A number the agent set for itself,
+and a model it asks for a second opinion. Both of them are code that whoever runs the agent can
+change, delete, or reword.
+[ point at the right-hand card — this is the one that surprises people ]
+And it's worse than that, in a way people don't expect.
+That limit is per purchase. Nothing anywhere tracks the total. An agent with a six-unit limit and a
+ninety-nine-thousand balance can spend every last unit of it — six at a time — without violating
+its limit once. Every individual purchase is compliant. The wallet still empties.
+[ pause ]
+Nothing on the chain caps this wallet. It spent three today because it decided to.
+An agent promising not to overspend is not the same thing as an agent that cannot.
+[ DON'T claim the env var makes it pay anything — tested, the model still refuses. The honest
+  version is the one above: both guardrails live inside the agent. ]</a:t>
             </a:r>
             <a:endParaRPr lang="en-US" dirty="0"/>
           </a:p>
@@ -1113,16 +1206,16 @@
           <a:p>
             <a:r>
               <a:rPr lang="en-US" dirty="0"/>
-              <a:t>[ SCREEN — DECK ]
-"Really three separate questions, and today only answered the first.
-Who am I paying? Answered — the registry, checked before any money moves.
-What am I allowed to spend? Not answered. That's session eight: a cap the chain itself
-enforces, that the agent can't raise by editing a variable, because it doesn't own the
-authority — it inherits it.
-What if they don't deliver? Also not answered. Today it's fire-and-forget: pay, and hope.
-Session nine makes it pay-on-delivery with MOI's native lockup and release."
-If asked what happens today when a seller takes the money and vanishes: you lose it. Same as
-cash across a counter. Don't dress it up.</a:t>
+              <a:t>[ DECK · slide 7 ]
+Which brings us back to the three questions, and the honest scorecard.
+Who am I paying? Answered. The registry, checked before any money moves.
+What am I allowed to spend? Not answered. That's session eight — a cap the chain itself enforces,
+that the agent can't lift by editing a variable, because it doesn't own that authority. It inherits
+it.
+And what happens if they don't deliver? Also not answered. Right now it's pay and hope. Session
+nine makes it pay-on-delivery, using MOI's native lockup and release.
+[ IF ASKED what happens today when a seller takes the money and vanishes: you lose it. Same as cash
+  across a counter. Don't dress it up. ]</a:t>
             </a:r>
             <a:endParaRPr lang="en-US" dirty="0"/>
           </a:p>
@@ -1210,19 +1303,27 @@
           <a:p>
             <a:r>
               <a:rPr lang="en-US" dirty="0"/>
-              <a:t>[ SCREEN — DECK ]  Close here, then Q&amp;A.
-"Everything you saw settled on MOI devnet. The interaction hashes are real — you can look them
-up. The repo's linked; one funded wallet runs the whole thing.
-The payment was the easy half. What makes it safe to pay a stranger is knowing who they are —
-and next time, bounding what your agent can do on your behalf."
-LIKELY QUESTIONS
- · "seller takes the money and doesn't deliver?" — you lose it. Session 9.
- · "are these really two separate agents?" — two wallets, two on-chain identities, but one
-   machine and one mnemonic today. The chain doesn't care; the transfer is real either way.
- · "why not x402?" — we built that first, it's on a branch. Buys interoperability, costs about
-   twice the code and a second service. The identity check is identical in both.
- · "what stops a replayed payment?" — the transfer hash is burned. Honest caveat: that set is
-   in memory, so restarting the seller resets it.</a:t>
+              <a:t>[ DECK · slide 8 ]  Close here, then Q&amp;A.
+Everything you just watched settled on MOI devnet. Those interaction hashes are real — go and look
+them up. The repo is linked, and one funded wallet runs the whole thing.
+And the thing I want you to walk away with isn't the payment. Moving money is the easy part.
+It's the check that happens in the second before the money moves — and the fact that an agent can
+only make that check because there's a chain it can go and ask.
+Next time: what happens when it isn't allowed to spend it in the first place.
+=== LIKELY QUESTIONS ===
+Seller takes the money and delivers nothing? You lose it. Same as cash across a counter. Session
+nine makes the payment conditional on delivery.
+Are these really two separate agents? Two wallets, two on-chain identities, two independent
+decisions. But one machine and one mnemonic today — same operator, two accounts. The chain doesn't
+know or care, and the transfer between them is real either way.
+Why not x402? Built that first; it's on a branch. It buys interoperability — any x402 client could
+pay this seller. It costs about twice the code and a second service to run. The identity check,
+which is the actual point, is identical in both.
+What stops a replayed payment? The transfer hash is burned once it's bought something. Honest
+caveat: that set is in memory, so restarting the seller resets it. A real seller persists it.
+Is the seller's product real? No. It's a stub — invented numbers with a disclaimer on every
+response. The payment machinery around it is real, and that's the part that doesn't change when you
+put a genuine model behind it.</a:t>
             </a:r>
             <a:endParaRPr lang="en-US" dirty="0"/>
           </a:p>

--- a/session-7/deck/MOI_Builders_S7-new.pptx
+++ b/session-7/deck/MOI_Builders_S7-new.pptx
@@ -509,13 +509,24 @@
           <a:p>
             <a:r>
               <a:rPr lang="en-US" dirty="0"/>
-              <a:t>[ DECK · slide 1 ]  Open cold. Do not read the slide.
-Two programs. One of them sells probability estimates on bitcoin. The other one has a question it
-can't answer for itself.
-They have never met. No account, no API key, nobody introduced them.
-In about thirty seconds, one of them is going to find the other, decide it's legitimate, and pay
-it — and the only thing I'll touch is the keyboard, once, at the start.
-Let's meet them properly.
+              <a:t>[ DECK · slide 1 ]  Open cold. Don't read the slide out.
+Hey everyone — welcome back to MOI Builders. I'm Adi, I work on ecosystem here at Sarva Labs, and
+this is session seven.
+Quick hello if you're new: grab the repo link in the description, everything I run today is in
+there and you can follow along or break it afterwards, whichever you prefer.
+And if you've been with us the last few sessions — you've already put an agent on chain. Session
+three was the agent registry, session four was native assets and swaps. So you've got agents that
+exist, and you've got money that moves. What you haven't had yet is the two of them in the same
+room.
+That's today. I want to show you two agents doing business with each other.
+[ gesture at the slide ]
+So here's what's actually running on my machine right now. Two programs. One of them sells
+probability estimates on bitcoin. The other one has a question it can't answer for itself.
+And the interesting part — they've never met. No account, no API key, nobody introduced them. They
+genuinely do not know about each other yet.
+In about thirty seconds one of them is going to find the other, decide it's legitimate, and pay it.
+And the only thing I'm going to touch is the keyboard, once, at the very start.
+Let me introduce them properly first.
 [ next slide ]</a:t>
             </a:r>
             <a:endParaRPr lang="en-US" dirty="0"/>
@@ -604,26 +615,29 @@
           <a:p>
             <a:r>
               <a:rPr lang="en-US" dirty="0"/>
-              <a:t>[ DECK · slide 2 ]  Stay here. This is the whole setup. Nothing to click.
-Let me introduce them properly, because I'm going to keep calling these agents and that word gets
-thrown around.
-On the left, the Risk Agent. It's the buyer. It has a question, it can't answer it, and it has a
-wallet. Two things make it an agent and not a script: it works out which market actually answers
-its question, and it decides whether the price it gets quoted is worth paying.
-On the right, the Signal Desk. It sells probability estimates. Will bitcoin draw down more than
-twenty percent this quarter. Will it close higher next week. And here's the part I like — it sets
-its own price, per request. That number is not sitting in a config file somewhere. The desk decides
-it, every single time you ask.
-[ pause — then point at the gap in the middle ]
-Now the important bit.
+              <a:t>[ DECK · slide 2 ]  Stay here a while. This is the whole setup. Nothing to click.
+Okay. So let me actually introduce these two, because I'm going to keep saying "agent" for the next
+forty minutes and I'd rather be precise about what I mean by it.
+On the left — the Risk Agent. This one's the buyer. It's got a question, it can't answer it, and it
+has a wallet. And two things make it an agent rather than just a script: it works out for itself
+which market actually answers its question, and it decides whether the price it gets quoted is
+worth paying. Both of those are real decisions.
+On the right — the Signal Desk. This one sells probability estimates. Will bitcoin draw down more
+than twenty percent this quarter. Will it close higher next week. That sort of thing.
+And here's the bit I like about it. It sets its own price, per request. That number isn't sitting in
+a config file that I wrote. The desk works it out, fresh, every single time somebody asks.
+[ pause — now point at the gap in the middle ]
+Right. Now the important bit, and it's the empty space in the middle of this slide.
 The buyer does not have the seller's address. It doesn't have its URL. It doesn't know it exists.
-There's no shared secret, no contract, nobody signed up for anything.
-The only thing these two have in common is that strip along the bottom. They're both registered on
-MOI, and the money they'll settle in is native to it. That's the entire relationship.
-So — how does one of them pay the other?
-[ CAREFUL: the seller sets its price, it does not decline a sale. Refusing isn't implemented.
-  Don't claim "two AI agents transacting autonomously" beyond what's on the slide — the seller's
-  product is a stub and someone will ask. ]</a:t>
+There's no shared secret, no contract, nobody signed up to anything.
+The only thing these two have in common is that strip along the bottom — they're both registered on
+MOI, and the money they're going to settle in is native to it. That's the entire relationship.
+That's all they've got.
+So the question for the rest of this session is a pretty simple one: how does one of them pay the
+other?
+[ CAREFUL — the seller sets its own price, but it does NOT decline a sale. Refusing isn't
+  implemented. And don't say "two AI agents transacting autonomously" beyond what's on the slide;
+  the seller's product is a stub and somebody will ask. ]</a:t>
             </a:r>
             <a:endParaRPr lang="en-US" dirty="0"/>
           </a:p>
@@ -712,19 +726,23 @@
             <a:r>
               <a:rPr lang="en-US" dirty="0"/>
               <a:t>[ DECK · slide 3 ]
-Moving money is the easy part. Chains have been doing that for the better part of two decades.
-The hard part is what you do without thinking, every single time you buy something from someone
-you've never met.
-You glance at the shop and decide it looks real. You've got a rough number in your head that you
-won't go past. And you assume that if nothing turns up, there's some way to get your money back.
-Three instincts. You don't even notice you're using them.
+Now, you might be thinking: this is a solved problem, right? Moving money is easy. And honestly,
+yeah — chains have been doing that for the better part of two decades. That's not the hard part.
+The hard part is everything you do without thinking, every single time you buy something from
+somebody you've never met.
+Think about it. You glance at the shop and you decide it looks real. You've got a rough number in
+your head that you're not going past. And you quietly assume that if nothing turns up, there's some
+way to get your money back.
+Three instincts. You don't even notice you're using them — but you'd notice immediately if they
+were gone.
 [ pause ]
-Take the human out and every one of them disappears. And you do have to take the human out —
-you can't approve a fraction-of-a-cent purchase by hand. The clicking costs more than the thing
-you're buying.
-So each of those instincts has to become something a machine can actually check. Three questions.
-Three sessions. Today is the first one.
-How do you know who you're paying?
+So take the human out, and every one of them disappears.
+And you do have to take the human out. You can't approve a fraction-of-a-cent purchase by hand. The
+clicking genuinely costs more than the thing you're buying.
+Which means each of those instincts has to turn into something a machine can actually check. Three
+questions — and it turns out that's three sessions, because they're each a different problem.
+Today is the first one. How do you know who you're paying?
+Let's go and watch it happen.
 [ &gt;&gt;&gt; SWITCH TO BROWSER — http://localhost:4000 ]</a:t>
             </a:r>
             <a:endParaRPr lang="en-US" dirty="0"/>
@@ -813,72 +831,84 @@
           <a:p>
             <a:r>
               <a:rPr lang="en-US" dirty="0"/>
-              <a:t>[ &gt;&gt;&gt; BROWSER — http://localhost:4000 ]  Leave this slide up while you switch.
-I'm going to type what I want, in plain language. Watch what I don't do. I don't name a seller, I
-don't name a price, and I don't give it an address.
+              <a:t>[ &gt;&gt;&gt; BROWSER — http://localhost:4000 ]  Leave this slide up while you switch across.
+Okay, so this is the buyer's console. And I'm just going to type what I want, in plain language.
+Watch what I don't do here. I don't name a seller. I don't name a price. I don't give it an
+address. I'm just telling it what I'm worried about.
 [ TYPE: should i be worried about a crash ]
 — 1 · "I don't know the answer to this" —
-First thing it does is admit it's stuck. That's the honest starting point for any agent: I can't
-answer this, so who can? And notice it isn't looking for a company. It's looking for a skill.
+And the first thing it does is admit it's stuck. Which I think is the honest starting point for any
+agent — I can't answer this, so who can?
+And notice it isn't going looking for a company. It's going looking for a skill.
 — 2 · "Found one" —
-There. One agent came back, and look at everything that came with it. An id, the wallet it
-registered, the URL where it lives, the skills it advertises. All of that came off the chain.
-I never gave it that address. I gave it a question.
+There we go. One agent came back. And look at everything that came with it — an id, the wallet it
+registered, the URL where it lives, the skills it says it has.
+All of that came off the chain. I never gave it that address. I gave it a question, and it worked
+the rest out.
 — 3 · "Here is what I sell" —
-Now it's reading the catalog, and the catalog is free. The questions are public — you only pay for
-the answers. That's deliberate. If browsing cost money, you couldn't work out what you wanted
-without paying to find out.
+Now it's reading the catalog, and the catalog is free. The questions are public, you only pay for
+the answers.
+That's deliberate, by the way. If browsing cost money you couldn't work out what you wanted without
+paying to find out — which is a rubbish shop.
 — 4 · "This is the one I want" —
-It went for the drawdown market. Look at "decided by" — that's a model, reasoning. And worth
-noticing: I typed the word "crash". That word appears nowhere in the catalog. The market says
-"draw down". Keyword matching would have missed it.
+And it's gone for the drawdown market. Look at "decided by" — that's a model, actually reasoning
+about it.
+Worth pointing out: I typed the word "crash". That word appears nowhere in this catalog. The market
+says "draw down". If this were keyword matching it would have missed it completely.
 — 5 · "402 Payment Required" —
-Four-oh-two. Payment Required. It's been sitting in the HTTP spec since 1997, essentially unused,
-because until recently nothing needed to charge a machine for a single request. And notice the desk
-tells me why it's charging this. That's its own pricing decision, not a lookup.
+And here's the bill. Four-oh-two, Payment Required.
+That status code has been sitting in the HTTP spec since 1997, basically unused, because until
+fairly recently nothing needed to charge a machine for a single request.
+And see how the desk tells me why it's charging this? That's its own pricing decision. It's not
+reading a number off a shelf.
 — 6 · "3 USDM — I'll pay that" —
-And the buyer decides whether that's fair. Two agents, two decisions, one transaction. If the desk
-had marked this up hard, you'd be watching the buyer walk away instead.
-— 7 · "Checked who I am paying" —  ** SLOW DOWN. THIS IS THE SESSION. **
-Here's the thing I actually want you to leave with.
-That address in the quote is thirty-two bytes. It tells you where to send money. It tells you
-absolutely nothing about whose address it is.
-No payment protocol can help you here. That's not what they're for. They move value; they don't
-vouch for people.
+And now the buyer decides whether that's fair. Two agents, two decisions, one transaction.
+If the desk had marked this up hard, you'd be watching the buyer walk away instead of pay.
+— 7 · "Checked who I am paying" —  ** SLOW DOWN. THIS IS THE WHOLE SESSION. **
+Okay. This one I want to sit on for a second, because this is the thing I actually want you to
+leave with.
+That address in the quote is thirty-two bytes. And those thirty-two bytes tell you where to send
+money. They tell you absolutely nothing about whose address it is.
+And no payment protocol can help you here. That's genuinely not what they're for. They move value.
+They don't vouch for people.
 [ pause ]
-So before it spends anything, the agent goes back to the chain and asks a different question: is
-this actually the wallet that this agent registered? It matches. Now it'll pay.
-That check takes about a second, and it happens before the money moves — not after. That ordering
-is the whole security property. There's no escrow here and nothing to claw back, so a check that
-runs late may as well not run at all.
+So before it spends anything, the agent goes back to the chain and asks a completely different
+question — is this actually the wallet that this agent registered?
+It matches. So now it'll pay.
+That check takes about a second. And crucially it happens before the money moves, not after. That
+ordering is the entire security property — there's no escrow here, nothing to claw back, so a check
+that runs late may as well not run at all.
 — 8 · "Paid — on chain, from my own wallet" —
-Money's moved. Real transfer, real interaction hash.
+And there's the money. Real transfer, real interaction hash.
 [ point at the green value next to "interaction" — click it, it copies ]
-That is not a receipt I printed for myself. That interaction is on devnet whether or not you
-believe a single thing on this screen. Paste it into an explorer and it's there.
-And read the wording — from my own wallet. On MOI, only the owner can move their own funds. Nobody
-is holding this money on anyone's behalf, because nobody can.
+That's not a receipt I printed for myself. That interaction is sitting on devnet whether or not you
+believe a single thing on this screen. Paste it into an explorer, it's there.
+And read the wording on that one — from my own wallet. On MOI only the owner can move their own
+funds. Nobody's holding this money on anybody's behalf, because nobody can.
 — 9 · "I checked your payment myself" —
-Seven checks. And the seller isn't taking the buyer's word for any of it. It goes and reads that
-interaction off the chain and decodes it. Right sender, right recipient, right amount, not already
-spent. Same hash at the bottom — the seller independently arrived at the transaction the buyer
+Seven checks now, on the seller's side. And it isn't taking the buyer's word for any of it — it
+goes and reads that interaction off the chain and decodes it. Right sender, right recipient, right
+amount, hasn't already been spent.
+Same hash at the bottom there. The seller independently arrived at the transaction the buyer
 claimed.
 — 10 · the answer —
-Paid. Delivered. Balance at the top dropped by three.
-One thing I want to say plainly, because it's a number about bitcoin and those get screenshotted.
-That probability is made up. There's no model behind it and no market data. Every response says so.
-Today is about the payment, not the forecast.
+And there it is. Paid, delivered, and the balance up the top just dropped by three.
+One thing I want to say plainly, because this is a number about bitcoin and those get
+screenshotted — that probability is made up. There's no model behind it, no market data. Every
+response says so in the payload. Today is about the payment, not the forecast.
 === THE REFUSAL — tick "Simulate a compromised listing", ask the same thing again ===
-Now let's break it. I've repointed the seller's registry entry at an attacker — as if someone got
-into the listing and swapped the payout address. The seller itself hasn't changed. It's still going
-to ask to be paid at its real address. Watch.
+Right. Now let's break it.
+So I've repointed the seller's registry entry at an attacker — imagine somebody got into the
+listing and swapped the payout address. The seller itself hasn't changed at all. It's still going to
+ask to be paid at its real address.
+Watch what happens.
 [ it stops at step 7 ]
-Stopped. The registry says one thing, the quote says another, and it walked.
-Money moved: none. And that's literal, not a friendly message. It never built a transaction. There
-is nothing to reverse, because nothing happened.
-[ let it sit ]
-And notice who caught it. Not the seller. Not a middleman. The one with something to lose.
-[ IF THE HAPPY PATH REFUSES: you Ctrl-C'd a tamper run earlier. Rerun it and let it finish. ]</a:t>
+And it stopped. Registry says one thing, quote says another, and it just walked away.
+"Money moved: none" — and that's literal, that's not a nice message I wrote. It never built a
+transaction. There's nothing to reverse because nothing happened.
+[ let it sit for a beat ]
+And notice who caught that. Not the seller. Not a middleman. The one with something to lose.
+[ IF THE HAPPY PATH REFUSES: you Ctrl-C'd a tamper run earlier. Rerun it, let it finish. ]</a:t>
             </a:r>
             <a:endParaRPr lang="en-US" dirty="0"/>
           </a:p>
@@ -967,48 +997,55 @@
             <a:r>
               <a:rPr lang="en-US" dirty="0"/>
               <a:t>[ &gt;&gt;&gt; EDITOR ]
-Four files. Everything that makes this safe is in them, and nowhere else.
+Okay, so let's look at how much code that actually is — because I think people assume this sort of
+thing is enormous, and it really isn't.
+Four files. Everything that makes this safe is in them and nowhere else.
 — payment-proof.ts —
-The entire wire format is two messages. The seller sends a Quote: here's my price, here's the
-asset, here's where to pay, and here's my agent id. The buyer sends back a Claim: I sent this much,
-to you, in this transaction, for this thing, and here's my signature over all of it.
-That's the protocol. No third service, nothing to negotiate.
+So the entire wire format is two messages.
+The seller sends a Quote — here's my price, here's the asset, here's where to pay, and here's my
+agent id. And the buyer sends back a Claim — I sent this much, to you, in this transaction, for
+this thing, and here's my signature over all of it.
+That's the protocol. There's no third service, nothing to negotiate.
 [ point at payToAgentId ]
-And that field is why any of this works. Take it away and payTo is thirty-two anonymous bytes
-again.
+And that field there is why any of this works. Take it away and payTo goes back to being thirty-two
+anonymous bytes.
 — identity-check.ts —  [ whole file on screen, 42 lines, don't scroll ]
-This is the idea the entire session is built on, and it's forty-two lines.
-[ point at the one line: if (normalizeAddress(registryWallet) !== normalizeAddress(quote.payTo)) ]
+And this is the idea the entire session is built on. Forty-two lines.
+[ point at: if (normalizeAddress(registryWallet) !== normalizeAddress(quote.payTo)) ]
 Read the wallet this agent registered. Compare it to the one on the invoice. Refuse if they
 disagree.
-That's it. That's the check no payment protocol can do for you, because it needs an identity that
-lives somewhere both parties can go and look — independently, without having to ask each other.
+That's it. That's the check no payment protocol can do for you — because it needs an identity that
+lives somewhere both parties can go and look independently, without having to ask each other.
 [ then show where approve() is called in pay.ts ]
 And this is where it runs. Before the transfer. Not after, not alongside — before. The payment
-client is physically incapable of spending until this returns a yes.
-— verify-proof.ts —  [ show two of the seven, don't read them all ]
-Check three, key binds to payer. Transfers are public. Anyone watching the chain can see that
-payment land. So what stops someone else grabbing my transaction hash, claiming it, and walking off
-with the answer I paid for? This. The claim is signed, and this check derives the account id back
-out of the public key. You cannot claim a payment you didn't make.
-Check six, transfer landed on chain. This is the seller doing the work itself — pulling the
-interaction, decoding the calldata, checking sender and recipient and amount. That's the cost of
-having no middleman. There's nobody to ask, so you look it up yourself.
+client literally cannot spend anything until this returns a yes.
+— verify-proof.ts —  [ show two of the seven, don't read them all out ]
+I'll show you two of these rather than all seven.
+Check three, key binds to payer. So — transfers are public. Anyone watching the chain can see that
+payment land. Which raises a fun question: what stops somebody else grabbing my transaction hash,
+claiming it, and walking off with the answer I paid for?
+This does. The claim is signed, and this check derives the account id back out of the public key.
+You can't claim a payment you didn't make.
+And check six, transfer landed on chain. This is the seller doing the work itself — pulling the
+interaction, decoding the calldata, checking sender and recipient and amount.
+That's the cost of not having a middleman. There's nobody to ask, so you go and look it up
+yourself.
 [ OPTIONAL — run: npm run attack-test ]
-Eleven forged payments. Every one rejected, and rejected for the right reason. Plus one honest
-payment that has to be accepted, because a verifier that refuses everything would otherwise look
-perfect.
+Eleven forged payments. Every one rejected, and rejected for the right reason — plus one honest
+payment that has to be accepted, because otherwise a verifier that just refuses everything would
+look perfect.
 — pricing.ts and worth.ts —
-These two are why I'm comfortable calling both of these agents. The desk decides what to charge.
-The buyer decides whether to pay it. Both of those are model calls.
-But look very carefully at what the model is not allowed to touch.
+And these last two are why I'm comfortable calling both of these agents. The desk decides what to
+charge, the buyer decides whether to pay it, and both of those are model calls.
+But — and this is the bit I'd really like you to take away from the code — look at what the model
+is not allowed to touch.
 [ point at the clamp in pricing.ts, then SOFT_LIMIT in worth.ts ]
-The price bounds are arithmetic. The buyer's hard ceiling is checked before the model is even
-asked — and that matters, because the seller's justification for its price goes straight into the
-buyer's prompt. That's untrusted text, written by the counterparty.
-A model can be talked into things. That's a wonderful property when you're choosing what to buy,
-and a disqualifying one when you're guarding a wallet.
-And nothing about whether a payment is valid goes near a model at all. That's arithmetic and
+The price bounds are arithmetic. And the buyer's hard ceiling gets checked before the model is even
+asked, which matters more than it looks — because the seller's justification for its price goes
+straight into the buyer's prompt. That's untrusted text, written by the counterparty.
+A model can be talked into things. That's a lovely property when you're choosing what to buy, and a
+disqualifying one when you're guarding a wallet.
+And nothing about whether a payment is valid goes anywhere near a model. That's all arithmetic and
 signatures.</a:t>
             </a:r>
             <a:endParaRPr lang="en-US" dirty="0"/>
@@ -1097,27 +1134,28 @@
           <a:p>
             <a:r>
               <a:rPr lang="en-US" dirty="0"/>
-              <a:t>[ DECK · slide 6 ]  — but run the command in the terminal first.
+              <a:t>[ DECK · slide 6 ]  — run the command in the terminal first, then come back to this slide.
+So — the buyer's got a spending limit. It refuses anything over six.
+Let me show you what that's actually worth.
 [ &gt;&gt;&gt; TERMINAL: MAX_PRICE_PER_ANSWER=999999 npm run ask -- "should i be worried about a crash" ]
-So the buyer has a spending limit. It refuses anything over six. Let me show you exactly what that
-is worth.
-I didn't touch the code. I set an environment variable, and the limit is gone.
-Now — it still won't pay something ridiculous, because there's a second opinion: the model's own
-read on whether a markup is reasonable. But look where that lives. Same process. It's a prompt I
-wrote, in a file I control.
+I didn't touch the code there. I set an environment variable, and the limit's gone.
+Now — to be fair, it still won't pay something ridiculous, because there's a second opinion in
+there: the model's own read on whether a markup is reasonable. But look where that lives. Same
+process. It's a prompt I wrote, in a file I control.
 [ pause ]
-That's the point. Every guardrail in this demo is self-imposed. A number the agent set for itself,
-and a model it asks for a second opinion. Both of them are code that whoever runs the agent can
-change, delete, or reword.
-[ point at the right-hand card — this is the one that surprises people ]
-And it's worse than that, in a way people don't expect.
-That limit is per purchase. Nothing anywhere tracks the total. An agent with a six-unit limit and a
-ninety-nine-thousand balance can spend every last unit of it — six at a time — without violating
-its limit once. Every individual purchase is compliant. The wallet still empties.
+And that's the point I want to make. Every guardrail in this demo is self-imposed. A number the
+agent set for itself, and a model it asks for a second opinion. Both of them are just code, and
+whoever runs the agent can change it, delete it, or reword it.
+[ point at the right-hand card ]
+And honestly it's worse than that, in a way people don't usually expect.
+That limit is per purchase. Nothing anywhere is tracking the total. So an agent with a six-unit
+limit and a ninety-nine-thousand balance can spend every last unit of it — six at a time — without
+ever violating its limit once. Every individual purchase is compliant. The wallet still empties.
 [ pause ]
-Nothing on the chain caps this wallet. It spent three today because it decided to.
-An agent promising not to overspend is not the same thing as an agent that cannot.
-[ DON'T claim the env var makes it pay anything — tested, the model still refuses. The honest
+There is nothing on the chain capping this wallet. It spent three today because it decided to.
+And that's the gap: an agent promising not to overspend is not the same thing as an agent that
+can't.
+[ DON'T say the env var makes it pay anything — I tested it, the model still refuses. The honest
   version is the one above: both guardrails live inside the agent. ]</a:t>
             </a:r>
             <a:endParaRPr lang="en-US" dirty="0"/>
@@ -1207,15 +1245,16 @@
             <a:r>
               <a:rPr lang="en-US" dirty="0"/>
               <a:t>[ DECK · slide 7 ]
-Which brings us back to the three questions, and the honest scorecard.
-Who am I paying? Answered. The registry, checked before any money moves.
-What am I allowed to spend? Not answered. That's session eight — a cap the chain itself enforces,
-that the agent can't lift by editing a variable, because it doesn't own that authority. It inherits
-it.
-And what happens if they don't deliver? Also not answered. Right now it's pay and hope. Session
-nine makes it pay-on-delivery, using MOI's native lockup and release.
-[ IF ASKED what happens today when a seller takes the money and vanishes: you lose it. Same as cash
-  across a counter. Don't dress it up. ]</a:t>
+So that brings us back to the three questions we started with — and an honest scorecard.
+Who am I paying? That one's answered. The registry, checked before any money moves. That's today.
+What am I allowed to spend? Not answered. And that's session eight — a cap that the chain itself
+enforces, that the agent can't just lift by editing a variable, because it doesn't own that
+authority. It inherits it. Which is a genuinely different thing, and it's the whole next session.
+And what happens if they don't deliver? Also not answered. Right now it is pay and hope. Session
+nine makes it pay-on-delivery using MOI's native lockup and release.
+So — one down, two to go. Come back for those.
+[ IF ASKED what happens today when a seller takes the money and vanishes: you lose it. Same as
+  handing over cash. Don't dress it up. ]</a:t>
             </a:r>
             <a:endParaRPr lang="en-US" dirty="0"/>
           </a:p>
@@ -1303,27 +1342,30 @@
           <a:p>
             <a:r>
               <a:rPr lang="en-US" dirty="0"/>
-              <a:t>[ DECK · slide 8 ]  Close here, then Q&amp;A.
-Everything you just watched settled on MOI devnet. Those interaction hashes are real — go and look
-them up. The repo is linked, and one funded wallet runs the whole thing.
-And the thing I want you to walk away with isn't the payment. Moving money is the easy part.
+              <a:t>[ DECK · slide 8 ]  Close here, then open it up for questions.
+Right — that's the session.
+Everything you just watched settled on MOI devnet. Those interaction hashes are real, go and look
+them up, I'd encourage it. The repo's linked, and one funded wallet runs the whole thing end to
+end — the seller never needs gas because it only ever receives.
+And the thing I'd like you to walk away with isn't the payment. Moving money is the easy part.
 It's the check that happens in the second before the money moves — and the fact that an agent can
-only make that check because there's a chain it can go and ask.
+only make that check because there's a chain sitting there that it can go and ask.
 Next time: what happens when it isn't allowed to spend it in the first place.
+Thanks for watching — happy to take questions.
 === LIKELY QUESTIONS ===
-Seller takes the money and delivers nothing? You lose it. Same as cash across a counter. Session
-nine makes the payment conditional on delivery.
+Seller takes the money and delivers nothing? You lose it. Same as handing over cash. Session nine
+makes the payment conditional on delivery.
 Are these really two separate agents? Two wallets, two on-chain identities, two independent
 decisions. But one machine and one mnemonic today — same operator, two accounts. The chain doesn't
 know or care, and the transfer between them is real either way.
-Why not x402? Built that first; it's on a branch. It buys interoperability — any x402 client could
-pay this seller. It costs about twice the code and a second service to run. The identity check,
+Why not x402? We built that first, it's on a branch. It buys you interoperability — any x402 client
+could pay this seller. Costs about twice the code and a second service to run. The identity check,
 which is the actual point, is identical in both.
-What stops a replayed payment? The transfer hash is burned once it's bought something. Honest
-caveat: that set is in memory, so restarting the seller resets it. A real seller persists it.
-Is the seller's product real? No. It's a stub — invented numbers with a disclaimer on every
+What stops a replayed payment? The transfer hash gets burned once it's bought something. Honest
+caveat: that set's in memory, so restarting the seller resets it. A real seller would persist it.
+Is the seller's product real? No — it's a stub. Invented numbers, with a disclaimer on every
 response. The payment machinery around it is real, and that's the part that doesn't change when you
-put a genuine model behind it.</a:t>
+put an actual model behind it.</a:t>
             </a:r>
             <a:endParaRPr lang="en-US" dirty="0"/>
           </a:p>

--- a/session-7/deck/MOI_Builders_S7-new.pptx
+++ b/session-7/deck/MOI_Builders_S7-new.pptx
@@ -512,18 +512,23 @@
               <a:t>[ DECK · slide 1 ]  Open cold. Don't read the slide out.
 Hey everyone — welcome back to MOI Builders. I'm Adi, I work on ecosystem here at Sarva Labs, and
 this is session seven.
-Quick hello if you're new: grab the repo link in the description, everything I run today is in
-there and you can follow along or break it afterwards, whichever you prefer.
+Quick hello if you're new: grab the repo link in the description. Everything I run today is in
+there, so you can follow along, or break it afterwards, whichever you prefer.
 And if you've been with us the last few sessions — you've already put an agent on chain. Session
 three was the agent registry, session four was native assets and swaps. So you've got agents that
 exist, and you've got money that moves. What you haven't had yet is the two of them in the same
 room.
-That's today. I want to show you two agents doing business with each other.
+That's today. Two agents, doing business with each other.
 [ gesture at the slide ]
-So here's what's actually running on my machine right now. Two programs. One of them sells
-probability estimates on bitcoin. The other one has a question it can't answer for itself.
-And the interesting part — they've never met. No account, no API key, nobody introduced them. They
-genuinely do not know about each other yet.
+So here's what's actually running on my machine right now.
+The first one's a forecasting desk. It sells probabilities on bitcoin — and by that I mean you ask
+it a yes-or-no question about the future, something like "will bitcoin drop more than twenty
+percent this quarter", and it hands you back a number. Twenty-eight percent. Sixty-two percent.
+Whatever it reckons. That's the whole product: one question, one number, and you pay per answer.
+The second one is the customer. It's a risk agent — it's got a question it can't answer for itself,
+and it's got a wallet.
+And here's the interesting part. They have never met. No account, no API key, nobody introduced
+them. Right now, neither of them knows the other one exists.
 In about thirty seconds one of them is going to find the other, decide it's legitimate, and pay it.
 And the only thing I'm going to touch is the keyboard, once, at the very start.
 Let me introduce them properly first.

--- a/session-7/deck/MOI_Builders_S7-new.pptx
+++ b/session-7/deck/MOI_Builders_S7-new.pptx
@@ -527,12 +527,28 @@
 Whatever it reckons. That's the whole product: one question, one number, and you pay per answer.
 The second one is the customer. It's a risk agent — it's got a question it can't answer for itself,
 and it's got a wallet.
-And here's the interesting part. They have never met. No account, no API key, nobody introduced
-them. Right now, neither of them knows the other one exists.
+[ slow down slightly — this is the "why would anyone pay for this" beat ]
+And that's worth pausing on for a second, because "why would anybody pay for a number" is a fair
+question.
+Think about what the buyer is actually doing. It's managing risk. And if it knew there was a thirty
+percent chance of a serious drawdown this quarter, it would behave differently than if that number
+were three percent. The number changes what it does next. That's what makes it worth something —
+not the number itself, but the decision it unlocks.
+And it cannot produce that number on its own. It hasn't got the data, it hasn't got a model, and
+building one is somebody else's entire business. So it does exactly what you'd do. It buys the
+answer from someone whose job it is to have one.
+Which, I'd argue, is what most agent-to-agent commerce is actually going to look like. Not big
+dramatic purchases. Small, specific facts — one agent needs something, another agent already has
+it, and the whole exchange is over in a second.
+[ back up to pace ]
+Now — here's the interesting part. These two have never met. No account, no API key, nobody
+introduced them. Right now, neither of them knows the other one exists.
 In about thirty seconds one of them is going to find the other, decide it's legitimate, and pay it.
 And the only thing I'm going to touch is the keyboard, once, at the very start.
 Let me introduce them properly first.
-[ next slide ]</a:t>
+[ next slide ]
+[ NOTE: this is the value of the SHAPE of the product, not of our numbers. Ours are invented — you
+  say so out loud during the demo on slide 4. Don't oversell it here. ]</a:t>
             </a:r>
             <a:endParaRPr lang="en-US" dirty="0"/>
           </a:p>

--- a/session-7/deck/MOI_Builders_S7-new.pptx
+++ b/session-7/deck/MOI_Builders_S7-new.pptx
@@ -636,26 +636,28 @@
           <a:p>
             <a:r>
               <a:rPr lang="en-US" dirty="0"/>
-              <a:t>[ DECK · slide 2 ]  Stay here a while. This is the whole setup. Nothing to click.
+              <a:t>[ DECK · slide 2 ]  Stay here. This is the whole setup. Nothing to click.
 Okay. So let me actually introduce these two, because I'm going to keep saying "agent" for the next
 forty minutes and I'd rather be precise about what I mean by it.
 On the left — the Risk Agent. This one's the buyer. It's got a question, it can't answer it, and it
 has a wallet. And two things make it an agent rather than just a script: it works out for itself
 which market actually answers its question, and it decides whether the price it gets quoted is
 worth paying. Both of those are real decisions.
-On the right — the Signal Desk. This one sells probability estimates. Will bitcoin draw down more
-than twenty percent this quarter. Will it close higher next week. That sort of thing.
-And here's the bit I like about it. It sets its own price, per request. That number isn't sitting in
-a config file that I wrote. The desk works it out, fresh, every single time somebody asks.
+On the right — the Signal Desk. This one's the seller. And here's the bit I like about it: it sets
+its own price, per request. That number isn't sitting in a config file that I wrote. The desk works
+it out, fresh, every single time somebody asks.
 [ pause — now point at the gap in the middle ]
 Right. Now the important bit, and it's the empty space in the middle of this slide.
 The buyer does not have the seller's address. It doesn't have its URL. It doesn't know it exists.
-There's no shared secret, no contract, nobody signed up to anything.
-The only thing these two have in common is that strip along the bottom — they're both registered on
-MOI, and the money they're going to settle in is native to it. That's the entire relationship.
-That's all they've got.
-So the question for the rest of this session is a pretty simple one: how does one of them pay the
-other?
+There's no shared secret, no contract, nobody signed up to anything. The only thing these two have
+in common is that strip along the bottom — they're both registered on MOI, and the money they'll
+settle in is native to it. That's the entire relationship.
+[ pause ]
+And that's what makes this hard, and worth a session. Because when a human buys from a stranger,
+you do a bunch of checking without even noticing — does this shop look real, am I okay with this
+price, can I get my money back. An agent has none of those instincts unless we build them. And the
+first one, the one everything else depends on, is: how do you know who you're paying?
+That's today's question. Let's watch it get answered.
 [ CAREFUL — the seller sets its own price, but it does NOT decline a sale. Refusing isn't
   implemented. And don't say "two AI agents transacting autonomously" beyond what's on the slide;
   the seller's product is a stub and somebody will ask. ]</a:t>
@@ -746,24 +748,12 @@
           <a:p>
             <a:r>
               <a:rPr lang="en-US" dirty="0"/>
-              <a:t>[ DECK · slide 3 ]
-Now, you might be thinking: this is a solved problem, right? Moving money is easy. And honestly,
-yeah — chains have been doing that for the better part of two decades. That's not the hard part.
-The hard part is everything you do without thinking, every single time you buy something from
-somebody you've never met.
-Think about it. You glance at the shop and you decide it looks real. You've got a rough number in
-your head that you're not going past. And you quietly assume that if nothing turns up, there's some
-way to get your money back.
-Three instincts. You don't even notice you're using them — but you'd notice immediately if they
-were gone.
-[ pause ]
-So take the human out, and every one of them disappears.
-And you do have to take the human out. You can't approve a fraction-of-a-cent purchase by hand. The
-clicking genuinely costs more than the thing you're buying.
-Which means each of those instincts has to turn into something a machine can actually check. Three
-questions — and it turns out that's three sessions, because they're each a different problem.
-Today is the first one. How do you know who you're paying?
-Let's go and watch it happen.
+              <a:t>[ DECK · slide 3 ]  Quick bridge — don't linger here, the demo is next.
+This slide is just the roadmap version of what I said: three human instincts, three machine
+questions, three sessions.
+Today is the top row — who am I paying. Spending caps are session eight, getting your money back is
+session nine.
+Right — enough slides. Let's go watch two agents do a deal.
 [ &gt;&gt;&gt; SWITCH TO BROWSER — http://localhost:4000 ]</a:t>
             </a:r>
             <a:endParaRPr lang="en-US" dirty="0"/>

--- a/session-7/deck/MOI_Builders_S7-new.pptx
+++ b/session-7/deck/MOI_Builders_S7-new.pptx
@@ -7,7 +7,6 @@
   <p:sldIdLst>
     <p:sldId id="256" r:id="rId2"/>
     <p:sldId id="257" r:id="rId3"/>
-    <p:sldId id="258" r:id="rId4"/>
     <p:sldId id="259" r:id="rId5"/>
     <p:sldId id="260" r:id="rId6"/>
     <p:sldId id="261" r:id="rId7"/>
@@ -509,46 +508,15 @@
           <a:p>
             <a:r>
               <a:rPr lang="en-US" dirty="0"/>
-              <a:t>[ DECK · slide 1 ]  Open cold. Don't read the slide out.
+              <a:t>[ DECK · slide 1 ]
 Hey everyone — welcome back to MOI Builders. I'm Adi, I work on ecosystem here at Sarva Labs, and
 this is session seven.
-Quick hello if you're new: grab the repo link in the description. Everything I run today is in
-there, so you can follow along, or break it afterwards, whichever you prefer.
-And if you've been with us the last few sessions — you've already put an agent on chain. Session
-three was the agent registry, session four was native assets and swaps. So you've got agents that
-exist, and you've got money that moves. What you haven't had yet is the two of them in the same
-room.
-That's today. Two agents, doing business with each other.
-[ gesture at the slide ]
-So here's what's actually running on my machine right now.
-The first one's a forecasting desk. It sells probabilities on bitcoin — and by that I mean you ask
-it a yes-or-no question about the future, something like "will bitcoin drop more than twenty
-percent this quarter", and it hands you back a number. Twenty-eight percent. Sixty-two percent.
-Whatever it reckons. That's the whole product: one question, one number, and you pay per answer.
-The second one is the customer. It's a risk agent — it's got a question it can't answer for itself,
-and it's got a wallet.
-[ slow down slightly — this is the "why would anyone pay for this" beat ]
-And that's worth pausing on for a second, because "why would anybody pay for a number" is a fair
-question.
-Think about what the buyer is actually doing. It's managing risk. And if it knew there was a thirty
-percent chance of a serious drawdown this quarter, it would behave differently than if that number
-were three percent. The number changes what it does next. That's what makes it worth something —
-not the number itself, but the decision it unlocks.
-And it cannot produce that number on its own. It hasn't got the data, it hasn't got a model, and
-building one is somebody else's entire business. So it does exactly what you'd do. It buys the
-answer from someone whose job it is to have one.
-Which, I'd argue, is what most agent-to-agent commerce is actually going to look like. Not big
-dramatic purchases. Small, specific facts — one agent needs something, another agent already has
-it, and the whole exchange is over in a second.
-[ back up to pace ]
-Now — here's the interesting part. These two have never met. No account, no API key, nobody
-introduced them. Right now, neither of them knows the other one exists.
-In about thirty seconds one of them is going to find the other, decide it's legitimate, and pay it.
-And the only thing I'm going to touch is the keyboard, once, at the very start.
-Let me introduce them properly first.
-[ next slide ]
-[ NOTE: this is the value of the SHAPE of the product, not of our numbers. Ours are invented — you
-  say so out loud during the demo on slide 4. Don't oversell it here. ]</a:t>
+If you're new: the repo link's in the description. Everything I run today is in there, so you can
+follow along or break it afterwards.
+Today is easy to say and fun to watch: two agents — and one of them is going to buy something from
+the other, without knowing the other one exists.
+Let me introduce the cast.
+[ next slide ]</a:t>
             </a:r>
             <a:endParaRPr lang="en-US" dirty="0"/>
           </a:p>
@@ -636,31 +604,24 @@
           <a:p>
             <a:r>
               <a:rPr lang="en-US" dirty="0"/>
-              <a:t>[ DECK · slide 2 ]  Stay here. This is the whole setup. Nothing to click.
-Okay. So let me actually introduce these two, because I'm going to keep saying "agent" for the next
-forty minutes and I'd rather be precise about what I mean by it.
-On the left — the Risk Agent. This one's the buyer. It's got a question, it can't answer it, and it
-has a wallet. And two things make it an agent rather than just a script: it works out for itself
-which market actually answers its question, and it decides whether the price it gets quoted is
-worth paying. Both of those are real decisions.
-On the right — the Signal Desk. This one's the seller. And here's the bit I like about it: it sets
-its own price, per request. That number isn't sitting in a config file that I wrote. The desk works
-it out, fresh, every single time somebody asks.
-[ pause — now point at the gap in the middle ]
-Right. Now the important bit, and it's the empty space in the middle of this slide.
-The buyer does not have the seller's address. It doesn't have its URL. It doesn't know it exists.
-There's no shared secret, no contract, nobody signed up to anything. The only thing these two have
-in common is that strip along the bottom — they're both registered on MOI, and the money they'll
-settle in is native to it. That's the entire relationship.
-[ pause ]
-And that's what makes this hard, and worth a session. Because when a human buys from a stranger,
-you do a bunch of checking without even noticing — does this shop look real, am I okay with this
-price, can I get my money back. An agent has none of those instincts unless we build them. And the
-first one, the one everything else depends on, is: how do you know who you're paying?
-That's today's question. Let's watch it get answered.
-[ CAREFUL — the seller sets its own price, but it does NOT decline a sale. Refusing isn't
-  implemented. And don't say "two AI agents transacting autonomously" beyond what's on the slide;
-  the seller's product is a stub and somebody will ask. ]</a:t>
+              <a:t>[ DECK · slide 2 ]  Everything before the demo happens on this slide. Keep it moving.
+Two agents.
+On the right — the Signal Desk. The seller. It sells probabilities on bitcoin: you ask it a
+yes-or-no question about the future — will bitcoin drop twenty percent this quarter — and it sells
+you back a number. And it sets its own price, per answer, every time someone asks.
+On the left — the Risk Agent. The buyer. It's got a question it can't answer, and it's got a
+wallet. And a number like that is worth paying for, because it changes what you do next — a thirty
+percent chance of a crash means acting very differently than a three percent one.
+[ point at the gap in the middle ]
+Here's the catch: the buyer doesn't know the seller exists. No URL, no API key, no account. The
+one thing they share is that strip at the bottom — they're both registered on MOI.
+So here's what you're about to watch, in one breath. The buyer searches MOI's agent registry and
+finds the seller. It gets quoted a price. It checks, on chain, that the address it's told to pay
+really belongs to that agent. It pays from its own wallet. The seller confirms the payment by
+reading the chain — and hands over the answer.
+That's the whole flow. Let's watch it for real.
+[ &gt;&gt;&gt; SWITCH TO BROWSER — http://localhost:4000 ]
+[ CAREFUL: the seller prices per request, but it can NOT decline a sale — not implemented. ]</a:t>
             </a:r>
             <a:endParaRPr lang="en-US" dirty="0"/>
           </a:p>
@@ -684,100 +645,6 @@
             <a:fld id="{F7021451-1387-4CA6-816F-3879F97B5CBC}" type="slidenum">
               <a:rPr lang="en-US"/>
               <a:t>2</a:t>
-            </a:fld>
-            <a:endParaRPr lang="en-US"/>
-          </a:p>
-        </p:txBody>
-      </p:sp>
-    </p:spTree>
-    <p:extLst>
-      <p:ext uri="{BB962C8B-B14F-4D97-AF65-F5344CB8AC3E}">
-        <p14:creationId xmlns:p14="http://schemas.microsoft.com/office/powerpoint/2010/main" val="1024086991"/>
-      </p:ext>
-    </p:extLst>
-  </p:cSld>
-  <p:clrMapOvr>
-    <a:masterClrMapping/>
-  </p:clrMapOvr>
-</p:notes>
-</file>
-
-<file path=ppt/notesSlides/notesSlide3.xml><?xml version="1.0" encoding="utf-8"?>
-<p:notes xmlns:a="http://schemas.openxmlformats.org/drawingml/2006/main" xmlns:r="http://schemas.openxmlformats.org/officeDocument/2006/relationships" xmlns:p="http://schemas.openxmlformats.org/presentationml/2006/main">
-  <p:cSld>
-    <p:spTree>
-      <p:nvGrpSpPr>
-        <p:cNvPr id="1" name=""/>
-        <p:cNvGrpSpPr/>
-        <p:nvPr/>
-      </p:nvGrpSpPr>
-      <p:grpSpPr>
-        <a:xfrm>
-          <a:off x="0" y="0"/>
-          <a:ext cx="0" cy="0"/>
-          <a:chOff x="0" y="0"/>
-          <a:chExt cx="0" cy="0"/>
-        </a:xfrm>
-      </p:grpSpPr>
-      <p:sp>
-        <p:nvSpPr>
-          <p:cNvPr id="2" name="Slide Image Placeholder 1"/>
-          <p:cNvSpPr>
-            <a:spLocks noGrp="1" noRot="1" noChangeAspect="1"/>
-          </p:cNvSpPr>
-          <p:nvPr>
-            <p:ph type="sldImg"/>
-          </p:nvPr>
-        </p:nvSpPr>
-        <p:spPr/>
-      </p:sp>
-      <p:sp>
-        <p:nvSpPr>
-          <p:cNvPr id="3" name="Notes Placeholder 2"/>
-          <p:cNvSpPr>
-            <a:spLocks noGrp="1"/>
-          </p:cNvSpPr>
-          <p:nvPr>
-            <p:ph type="body" idx="1"/>
-          </p:nvPr>
-        </p:nvSpPr>
-        <p:spPr/>
-        <p:txBody>
-          <a:bodyPr/>
-          <a:lstStyle/>
-          <a:p>
-            <a:r>
-              <a:rPr lang="en-US" dirty="0"/>
-              <a:t>[ DECK · slide 3 ]  Quick bridge — don't linger here, the demo is next.
-This slide is just the roadmap version of what I said: three human instincts, three machine
-questions, three sessions.
-Today is the top row — who am I paying. Spending caps are session eight, getting your money back is
-session nine.
-Right — enough slides. Let's go watch two agents do a deal.
-[ &gt;&gt;&gt; SWITCH TO BROWSER — http://localhost:4000 ]</a:t>
-            </a:r>
-            <a:endParaRPr lang="en-US" dirty="0"/>
-          </a:p>
-        </p:txBody>
-      </p:sp>
-      <p:sp>
-        <p:nvSpPr>
-          <p:cNvPr id="4" name="Slide Number Placeholder 3"/>
-          <p:cNvSpPr>
-            <a:spLocks noGrp="1"/>
-          </p:cNvSpPr>
-          <p:nvPr>
-            <p:ph type="sldNum" sz="quarter" idx="10"/>
-          </p:nvPr>
-        </p:nvSpPr>
-        <p:spPr/>
-        <p:txBody>
-          <a:bodyPr/>
-          <a:lstStyle/>
-          <a:p>
-            <a:fld id="{F7021451-1387-4CA6-816F-3879F97B5CBC}" type="slidenum">
-              <a:rPr lang="en-US"/>
-              <a:t>3</a:t>
             </a:fld>
             <a:endParaRPr lang="en-US"/>
           </a:p>
@@ -842,84 +709,27 @@
           <a:p>
             <a:r>
               <a:rPr lang="en-US" dirty="0"/>
-              <a:t>[ &gt;&gt;&gt; BROWSER — http://localhost:4000 ]  Leave this slide up while you switch across.
-Okay, so this is the buyer's console. And I'm just going to type what I want, in plain language.
-Watch what I don't do here. I don't name a seller. I don't name a price. I don't give it an
-address. I'm just telling it what I'm worried about.
-[ TYPE: should i be worried about a crash ]
-— 1 · "I don't know the answer to this" —
-And the first thing it does is admit it's stuck. Which I think is the honest starting point for any
-agent — I can't answer this, so who can?
-And notice it isn't going looking for a company. It's going looking for a skill.
-— 2 · "Found one" —
-There we go. One agent came back. And look at everything that came with it — an id, the wallet it
-registered, the URL where it lives, the skills it says it has.
-All of that came off the chain. I never gave it that address. I gave it a question, and it worked
-the rest out.
-— 3 · "Here is what I sell" —
-Now it's reading the catalog, and the catalog is free. The questions are public, you only pay for
-the answers.
-That's deliberate, by the way. If browsing cost money you couldn't work out what you wanted without
-paying to find out — which is a rubbish shop.
-— 4 · "This is the one I want" —
-And it's gone for the drawdown market. Look at "decided by" — that's a model, actually reasoning
-about it.
-Worth pointing out: I typed the word "crash". That word appears nowhere in this catalog. The market
-says "draw down". If this were keyword matching it would have missed it completely.
-— 5 · "402 Payment Required" —
-And here's the bill. Four-oh-two, Payment Required.
-That status code has been sitting in the HTTP spec since 1997, basically unused, because until
-fairly recently nothing needed to charge a machine for a single request.
-And see how the desk tells me why it's charging this? That's its own pricing decision. It's not
-reading a number off a shelf.
-— 6 · "3 USDM — I'll pay that" —
-And now the buyer decides whether that's fair. Two agents, two decisions, one transaction.
-If the desk had marked this up hard, you'd be watching the buyer walk away instead of pay.
-— 7 · "Checked who I am paying" —  ** SLOW DOWN. THIS IS THE WHOLE SESSION. **
-Okay. This one I want to sit on for a second, because this is the thing I actually want you to
-leave with.
-That address in the quote is thirty-two bytes. And those thirty-two bytes tell you where to send
-money. They tell you absolutely nothing about whose address it is.
-And no payment protocol can help you here. That's genuinely not what they're for. They move value.
-They don't vouch for people.
-[ pause ]
-So before it spends anything, the agent goes back to the chain and asks a completely different
-question — is this actually the wallet that this agent registered?
-It matches. So now it'll pay.
-That check takes about a second. And crucially it happens before the money moves, not after. That
-ordering is the entire security property — there's no escrow here, nothing to claw back, so a check
-that runs late may as well not run at all.
-— 8 · "Paid — on chain, from my own wallet" —
-And there's the money. Real transfer, real interaction hash.
-[ point at the green value next to "interaction" — click it, it copies ]
-That's not a receipt I printed for myself. That interaction is sitting on devnet whether or not you
-believe a single thing on this screen. Paste it into an explorer, it's there.
-And read the wording on that one — from my own wallet. On MOI only the owner can move their own
-funds. Nobody's holding this money on anybody's behalf, because nobody can.
-— 9 · "I checked your payment myself" —
-Seven checks now, on the seller's side. And it isn't taking the buyer's word for any of it — it
-goes and reads that interaction off the chain and decodes it. Right sender, right recipient, right
-amount, hasn't already been spent.
-Same hash at the bottom there. The seller independently arrived at the transaction the buyer
-claimed.
-— 10 · the answer —
-And there it is. Paid, delivered, and the balance up the top just dropped by three.
-One thing I want to say plainly, because this is a number about bitcoin and those get
-screenshotted — that probability is made up. There's no model behind it, no market data. Every
-response says so in the payload. Today is about the payment, not the forecast.
-=== THE REFUSAL — tick "Simulate a compromised listing", ask the same thing again ===
-Right. Now let's break it.
-So I've repointed the seller's registry entry at an attacker — imagine somebody got into the
-listing and swapped the payout address. The seller itself hasn't changed at all. It's still going to
-ask to be paid at its real address.
-Watch what happens.
-[ it stops at step 7 ]
-And it stopped. Registry says one thing, quote says another, and it just walked away.
-"Money moved: none" — and that's literal, that's not a nice message I wrote. It never built a
-transaction. There's nothing to reverse because nothing happened.
-[ let it sit for a beat ]
-And notice who caught that. Not the seller. Not a middleman. The one with something to lose.
-[ IF THE HAPPY PATH REFUSES: you Ctrl-C'd a tamper run earlier. Rerun it, let it finish. ]</a:t>
+              <a:t>[ &gt;&gt;&gt; BROWSER — http://localhost:4000 ]   TYPE: should i be worried about a crash
+Cards land ~6 seconds apart. One or two sentences per card — the screen does the rest.
+1 · It admits it doesn't know the answer — so it goes looking. Not for a company, for a skill.
+2 · Found one. Id, wallet, URL, skills — all read off the chain. I never gave it an address.
+3 · The catalog's free. Questions are public; you only pay for answers.
+4 · The model picked the drawdown market. I typed "crash" — that word isn't in the catalog.
+5 · HTTP 402 — the bill. And that price is the seller's own decision, made just now.
+6 · The buyer judges the price. Fair — so it goes ahead.
+7 · The key moment: before paying, it checks the chain — is that address really this agent's
+    registered wallet? Match. Safe to pay.
+8 · Real money, real hash. Click it — that transaction is on devnet, go look it up.
+9 · The seller doesn't take the buyer's word — it reads the transfer off the chain itself.
+    Seven checks.
+10 · Paid, delivered, balance drops by three. Say it out loud: the probability is made up —
+     the payment is real, the forecast is a placeholder.
+=== REFUSAL — tick "Simulate a compromised listing", ask the same question ===
+I've pointed the seller's registry entry at an attacker — as if someone hacked the listing.
+It stops at the identity check. Registry says one address, quote says another — the buyer walks.
+Money moved: none. It never even built a transaction.
+[ If a normal run refuses: an interrupted tamper run left the registry dirty. Rerun it, let it
+  finish. ]</a:t>
             </a:r>
             <a:endParaRPr lang="en-US" dirty="0"/>
           </a:p>
@@ -1145,29 +955,20 @@
           <a:p>
             <a:r>
               <a:rPr lang="en-US" dirty="0"/>
-              <a:t>[ DECK · slide 6 ]  — run the command in the terminal first, then come back to this slide.
-So — the buyer's got a spending limit. It refuses anything over six.
-Let me show you what that's actually worth.
+              <a:t>[ DECK ]  Run the command first, then talk over this slide.
 [ &gt;&gt;&gt; TERMINAL: MAX_PRICE_PER_ANSWER=999999 npm run ask -- "should i be worried about a crash" ]
-I didn't touch the code there. I set an environment variable, and the limit's gone.
-Now — to be fair, it still won't pay something ridiculous, because there's a second opinion in
-there: the model's own read on whether a markup is reasonable. But look where that lives. Same
-process. It's a prompt I wrote, in a file I control.
-[ pause ]
-And that's the point I want to make. Every guardrail in this demo is self-imposed. A number the
-agent set for itself, and a model it asks for a second opinion. Both of them are just code, and
-whoever runs the agent can change it, delete it, or reword it.
+So the buyer has a spending limit — it refuses anything over six. Here's what that limit is
+actually worth: I just set one environment variable, and it's gone. I didn't touch the code.
+Now, it still won't pay something ridiculous — there's a second opinion, the model's own read on
+whether a markup is reasonable. But look where that lives. Same process. A prompt I wrote, in a
+file I control.
 [ point at the right-hand card ]
-And honestly it's worse than that, in a way people don't usually expect.
-That limit is per purchase. Nothing anywhere is tracking the total. So an agent with a six-unit
-limit and a ninety-nine-thousand balance can spend every last unit of it — six at a time — without
-ever violating its limit once. Every individual purchase is compliant. The wallet still empties.
-[ pause ]
-There is nothing on the chain capping this wallet. It spent three today because it decided to.
-And that's the gap: an agent promising not to overspend is not the same thing as an agent that
-can't.
-[ DON'T say the env var makes it pay anything — I tested it, the model still refuses. The honest
-  version is the one above: both guardrails live inside the agent. ]</a:t>
+And it's worse than it looks. That limit is per purchase — nothing tracks the total. Six at a
+time, this wallet can be emptied without ever breaking its limit once.
+Every guardrail you've seen today is self-imposed. Nothing on the chain caps this wallet. An agent
+promising not to overspend is not the same thing as an agent that cannot.
+[ DON'T say the env var makes it pay anything — the model still refuses silly prices. The point is
+  where the guardrails live, not that they're gone. ]</a:t>
             </a:r>
             <a:endParaRPr lang="en-US" dirty="0"/>
           </a:p>
@@ -1255,17 +1056,12 @@
           <a:p>
             <a:r>
               <a:rPr lang="en-US" dirty="0"/>
-              <a:t>[ DECK · slide 7 ]
-So that brings us back to the three questions we started with — and an honest scorecard.
-Who am I paying? That one's answered. The registry, checked before any money moves. That's today.
-What am I allowed to spend? Not answered. And that's session eight — a cap that the chain itself
-enforces, that the agent can't just lift by editing a variable, because it doesn't own that
-authority. It inherits it. Which is a genuinely different thing, and it's the whole next session.
-And what happens if they don't deliver? Also not answered. Right now it is pay and hope. Session
-nine makes it pay-on-delivery using MOI's native lockup and release.
-So — one down, two to go. Come back for those.
-[ IF ASKED what happens today when a seller takes the money and vanishes: you lose it. Same as
-  handing over cash. Don't dress it up. ]</a:t>
+              <a:t>[ DECK ]
+And that gap is exactly what we fix next — using MOI itself.
+Session eight: spending authority the agent inherits from the chain instead of setting for
+itself — a cap it can't edit away, because it doesn't own it.
+Session nine: pay-on-delivery, so "what if they don't deliver" stops being "you lose your money."
+Today you always know who you're paying. Next time, the chain decides what an agent may spend.</a:t>
             </a:r>
             <a:endParaRPr lang="en-US" dirty="0"/>
           </a:p>
@@ -1353,30 +1149,18 @@
           <a:p>
             <a:r>
               <a:rPr lang="en-US" dirty="0"/>
-              <a:t>[ DECK · slide 8 ]  Close here, then open it up for questions.
-Right — that's the session.
-Everything you just watched settled on MOI devnet. Those interaction hashes are real, go and look
-them up, I'd encourage it. The repo's linked, and one funded wallet runs the whole thing end to
-end — the seller never needs gas because it only ever receives.
-And the thing I'd like you to walk away with isn't the payment. Moving money is the easy part.
-It's the check that happens in the second before the money moves — and the fact that an agent can
-only make that check because there's a chain sitting there that it can go and ask.
-Next time: what happens when it isn't allowed to spend it in the first place.
+              <a:t>[ DECK ]  Close, then Q&amp;A.
+That's the session. Everything you watched settled on MOI devnet — the hashes are real, go look
+them up. The repo's linked, and one funded wallet runs the whole thing.
 Thanks for watching — happy to take questions.
 === LIKELY QUESTIONS ===
-Seller takes the money and delivers nothing? You lose it. Same as handing over cash. Session nine
-makes the payment conditional on delivery.
-Are these really two separate agents? Two wallets, two on-chain identities, two independent
-decisions. But one machine and one mnemonic today — same operator, two accounts. The chain doesn't
-know or care, and the transfer between them is real either way.
-Why not x402? We built that first, it's on a branch. It buys you interoperability — any x402 client
-could pay this seller. Costs about twice the code and a second service to run. The identity check,
-which is the actual point, is identical in both.
-What stops a replayed payment? The transfer hash gets burned once it's bought something. Honest
-caveat: that set's in memory, so restarting the seller resets it. A real seller would persist it.
-Is the seller's product real? No — it's a stub. Invented numbers, with a disclaimer on every
-response. The payment machinery around it is real, and that's the part that doesn't change when you
-put an actual model behind it.</a:t>
+Seller takes the money and doesn't deliver? You lose it — that's what session nine fixes.
+Really two separate agents? Two wallets, two on-chain identities, two independent decisions — but
+one machine and one mnemonic today. The chain doesn't care; the transfer is real either way.
+What stops a replayed payment? The transfer hash is burned after one use. Caveat: that set's in
+memory, so restarting the seller resets it — a real seller would persist it.
+Is the product real? No — invented numbers, disclaimed on every response. The payment machinery
+around it is the real part.</a:t>
             </a:r>
             <a:endParaRPr lang="en-US" dirty="0"/>
           </a:p>
@@ -2571,7 +2355,7 @@
                 <a:ea typeface="JetBrains Mono" pitchFamily="34" charset="-122"/>
                 <a:cs typeface="JetBrains Mono" pitchFamily="34" charset="-120"/>
               </a:rPr>
-              <a:t>02 / 8</a:t>
+              <a:t>02 / 7</a:t>
             </a:r>
             <a:endParaRPr lang="en-US" sz="900" dirty="0"/>
           </a:p>
@@ -3556,821 +3340,6 @@
               <a:t> — what actually moves.</a:t>
             </a:r>
             <a:endParaRPr lang="en-US" sz="1250" dirty="0"/>
-          </a:p>
-        </p:txBody>
-      </p:sp>
-    </p:spTree>
-  </p:cSld>
-  <p:clrMapOvr>
-    <a:masterClrMapping/>
-  </p:clrMapOvr>
-</p:sld>
-</file>
-
-<file path=ppt/slides/slide3.xml><?xml version="1.0" encoding="utf-8"?>
-<p:sld xmlns:a="http://schemas.openxmlformats.org/drawingml/2006/main" xmlns:r="http://schemas.openxmlformats.org/officeDocument/2006/relationships" xmlns:p="http://schemas.openxmlformats.org/presentationml/2006/main">
-  <p:cSld name="Slide 3">
-    <p:bg>
-      <p:bgPr>
-        <a:solidFill>
-          <a:srgbClr val="FFFFFF"/>
-        </a:solidFill>
-      </p:bgPr>
-    </p:bg>
-    <p:spTree>
-      <p:nvGrpSpPr>
-        <p:cNvPr id="1" name=""/>
-        <p:cNvGrpSpPr/>
-        <p:nvPr/>
-      </p:nvGrpSpPr>
-      <p:grpSpPr>
-        <a:xfrm>
-          <a:off x="0" y="0"/>
-          <a:ext cx="0" cy="0"/>
-          <a:chOff x="0" y="0"/>
-          <a:chExt cx="0" cy="0"/>
-        </a:xfrm>
-      </p:grpSpPr>
-      <p:sp>
-        <p:nvSpPr>
-          <p:cNvPr id="3" name="Text 0"/>
-          <p:cNvSpPr/>
-          <p:nvPr/>
-        </p:nvSpPr>
-        <p:spPr>
-          <a:xfrm>
-            <a:off x="822960" y="502920"/>
-            <a:ext cx="3657600" cy="256032"/>
-          </a:xfrm>
-          <a:prstGeom prst="rect">
-            <a:avLst/>
-          </a:prstGeom>
-          <a:noFill/>
-          <a:ln/>
-        </p:spPr>
-        <p:txBody>
-          <a:bodyPr wrap="square" lIns="0" tIns="0" rIns="0" bIns="0" rtlCol="0" anchor="ctr"/>
-          <a:lstStyle/>
-          <a:p>
-            <a:pPr indent="0" marL="0">
-              <a:buNone/>
-            </a:pPr>
-            <a:r>
-              <a:rPr lang="en-US" sz="1000" b="1" spc="140" kern="0" dirty="0">
-                <a:solidFill>
-                  <a:srgbClr val="2D2BB6"/>
-                </a:solidFill>
-                <a:latin typeface="JetBrains Mono" pitchFamily="34" charset="0"/>
-                <a:ea typeface="JetBrains Mono" pitchFamily="34" charset="-122"/>
-                <a:cs typeface="JetBrains Mono" pitchFamily="34" charset="-120"/>
-              </a:rPr>
-              <a:t>MOI · BUILD 03</a:t>
-            </a:r>
-            <a:endParaRPr lang="en-US" sz="1000" dirty="0"/>
-          </a:p>
-        </p:txBody>
-      </p:sp>
-      <p:sp>
-        <p:nvSpPr>
-          <p:cNvPr id="4" name="Text 1"/>
-          <p:cNvSpPr/>
-          <p:nvPr/>
-        </p:nvSpPr>
-        <p:spPr>
-          <a:xfrm>
-            <a:off x="6793992" y="502920"/>
-            <a:ext cx="4572000" cy="256032"/>
-          </a:xfrm>
-          <a:prstGeom prst="rect">
-            <a:avLst/>
-          </a:prstGeom>
-          <a:noFill/>
-          <a:ln/>
-        </p:spPr>
-        <p:txBody>
-          <a:bodyPr wrap="square" lIns="0" tIns="0" rIns="0" bIns="0" rtlCol="0" anchor="ctr"/>
-          <a:lstStyle/>
-          <a:p>
-            <a:pPr algn="r" indent="0" marL="0">
-              <a:buNone/>
-            </a:pPr>
-            <a:r>
-              <a:rPr lang="en-US" sz="1000" spc="140" kern="0" dirty="0">
-                <a:solidFill>
-                  <a:srgbClr val="5B6170"/>
-                </a:solidFill>
-                <a:latin typeface="JetBrains Mono" pitchFamily="34" charset="0"/>
-                <a:ea typeface="JetBrains Mono" pitchFamily="34" charset="-122"/>
-                <a:cs typeface="JetBrains Mono" pitchFamily="34" charset="-120"/>
-              </a:rPr>
-              <a:t>THE PROBLEM</a:t>
-            </a:r>
-            <a:endParaRPr lang="en-US" sz="1000" dirty="0"/>
-          </a:p>
-        </p:txBody>
-      </p:sp>
-      <p:sp>
-        <p:nvSpPr>
-          <p:cNvPr id="5" name="Text 2"/>
-          <p:cNvSpPr/>
-          <p:nvPr/>
-        </p:nvSpPr>
-        <p:spPr>
-          <a:xfrm>
-            <a:off x="822960" y="6327648"/>
-            <a:ext cx="3657600" cy="237744"/>
-          </a:xfrm>
-          <a:prstGeom prst="rect">
-            <a:avLst/>
-          </a:prstGeom>
-          <a:noFill/>
-          <a:ln/>
-        </p:spPr>
-        <p:txBody>
-          <a:bodyPr wrap="square" lIns="0" tIns="0" rIns="0" bIns="0" rtlCol="0" anchor="ctr"/>
-          <a:lstStyle/>
-          <a:p>
-            <a:pPr indent="0" marL="0">
-              <a:buNone/>
-            </a:pPr>
-            <a:r>
-              <a:rPr lang="en-US" sz="900" dirty="0">
-                <a:solidFill>
-                  <a:srgbClr val="9AA0AE"/>
-                </a:solidFill>
-                <a:latin typeface="JetBrains Mono" pitchFamily="34" charset="0"/>
-                <a:ea typeface="JetBrains Mono" pitchFamily="34" charset="-122"/>
-                <a:cs typeface="JetBrains Mono" pitchFamily="34" charset="-120"/>
-              </a:rPr>
-              <a:t>moi builders · session 07</a:t>
-            </a:r>
-            <a:endParaRPr lang="en-US" sz="900" dirty="0"/>
-          </a:p>
-        </p:txBody>
-      </p:sp>
-      <p:sp>
-        <p:nvSpPr>
-          <p:cNvPr id="6" name="Text 3"/>
-          <p:cNvSpPr/>
-          <p:nvPr/>
-        </p:nvSpPr>
-        <p:spPr>
-          <a:xfrm>
-            <a:off x="9537192" y="6327648"/>
-            <a:ext cx="1828800" cy="237744"/>
-          </a:xfrm>
-          <a:prstGeom prst="rect">
-            <a:avLst/>
-          </a:prstGeom>
-          <a:noFill/>
-          <a:ln/>
-        </p:spPr>
-        <p:txBody>
-          <a:bodyPr wrap="square" lIns="0" tIns="0" rIns="0" bIns="0" rtlCol="0" anchor="ctr"/>
-          <a:lstStyle/>
-          <a:p>
-            <a:pPr algn="r" indent="0" marL="0">
-              <a:buNone/>
-            </a:pPr>
-            <a:r>
-              <a:rPr lang="en-US" sz="900" dirty="0">
-                <a:solidFill>
-                  <a:srgbClr val="9AA0AE"/>
-                </a:solidFill>
-                <a:latin typeface="JetBrains Mono" pitchFamily="34" charset="0"/>
-                <a:ea typeface="JetBrains Mono" pitchFamily="34" charset="-122"/>
-                <a:cs typeface="JetBrains Mono" pitchFamily="34" charset="-120"/>
-              </a:rPr>
-              <a:t>03 / 8</a:t>
-            </a:r>
-            <a:endParaRPr lang="en-US" sz="900" dirty="0"/>
-          </a:p>
-        </p:txBody>
-      </p:sp>
-      <p:sp>
-        <p:nvSpPr>
-          <p:cNvPr id="7" name="Text 4"/>
-          <p:cNvSpPr/>
-          <p:nvPr/>
-        </p:nvSpPr>
-        <p:spPr>
-          <a:xfrm>
-            <a:off x="822960" y="932688"/>
-            <a:ext cx="10543032" cy="658368"/>
-          </a:xfrm>
-          <a:prstGeom prst="rect">
-            <a:avLst/>
-          </a:prstGeom>
-          <a:noFill/>
-          <a:ln/>
-        </p:spPr>
-        <p:txBody>
-          <a:bodyPr wrap="square" lIns="0" tIns="0" rIns="0" bIns="0" rtlCol="0" anchor="ctr"/>
-          <a:lstStyle/>
-          <a:p>
-            <a:pPr indent="0" marL="0">
-              <a:buNone/>
-            </a:pPr>
-            <a:r>
-              <a:rPr lang="en-US" sz="3800" b="1" dirty="0">
-                <a:solidFill>
-                  <a:srgbClr val="0E1116"/>
-                </a:solidFill>
-                <a:latin typeface="Inter" pitchFamily="34" charset="0"/>
-                <a:ea typeface="Inter" pitchFamily="34" charset="-122"/>
-                <a:cs typeface="Inter" pitchFamily="34" charset="-120"/>
-              </a:rPr>
-              <a:t>Paying a stranger</a:t>
-            </a:r>
-            <a:endParaRPr lang="en-US" sz="3800" dirty="0"/>
-          </a:p>
-        </p:txBody>
-      </p:sp>
-      <p:sp>
-        <p:nvSpPr>
-          <p:cNvPr id="8" name="Text 5"/>
-          <p:cNvSpPr/>
-          <p:nvPr/>
-        </p:nvSpPr>
-        <p:spPr>
-          <a:xfrm>
-            <a:off x="822960" y="1682496"/>
-            <a:ext cx="10543032" cy="402336"/>
-          </a:xfrm>
-          <a:prstGeom prst="rect">
-            <a:avLst/>
-          </a:prstGeom>
-          <a:noFill/>
-          <a:ln/>
-        </p:spPr>
-        <p:txBody>
-          <a:bodyPr wrap="square" lIns="0" tIns="0" rIns="0" bIns="0" rtlCol="0" anchor="ctr"/>
-          <a:lstStyle/>
-          <a:p>
-            <a:pPr indent="0" marL="0">
-              <a:buNone/>
-            </a:pPr>
-            <a:r>
-              <a:rPr lang="en-US" sz="1450" dirty="0">
-                <a:solidFill>
-                  <a:srgbClr val="5B6170"/>
-                </a:solidFill>
-                <a:latin typeface="Inter" pitchFamily="34" charset="0"/>
-                <a:ea typeface="Inter" pitchFamily="34" charset="-122"/>
-                <a:cs typeface="Inter" pitchFamily="34" charset="-120"/>
-              </a:rPr>
-              <a:t>A human does three things without noticing. Take the human out and none of them happen by default.</a:t>
-            </a:r>
-            <a:endParaRPr lang="en-US" sz="1450" dirty="0"/>
-          </a:p>
-        </p:txBody>
-      </p:sp>
-      <p:sp>
-        <p:nvSpPr>
-          <p:cNvPr id="9" name="Shape 6"/>
-          <p:cNvSpPr/>
-          <p:nvPr/>
-        </p:nvSpPr>
-        <p:spPr>
-          <a:xfrm>
-            <a:off x="822960" y="2395728"/>
-            <a:ext cx="10543032" cy="1042416"/>
-          </a:xfrm>
-          <a:prstGeom prst="roundRect">
-            <a:avLst>
-              <a:gd name="adj" fmla="val 5263"/>
-            </a:avLst>
-          </a:prstGeom>
-          <a:solidFill>
-            <a:srgbClr val="2D2BB6"/>
-          </a:solidFill>
-          <a:ln w="12700">
-            <a:solidFill>
-              <a:srgbClr val="2D2BB6"/>
-            </a:solidFill>
-            <a:prstDash val="solid"/>
-          </a:ln>
-        </p:spPr>
-      </p:sp>
-      <p:sp>
-        <p:nvSpPr>
-          <p:cNvPr id="10" name="Text 7"/>
-          <p:cNvSpPr/>
-          <p:nvPr/>
-        </p:nvSpPr>
-        <p:spPr>
-          <a:xfrm>
-            <a:off x="1188720" y="2395728"/>
-            <a:ext cx="3749040" cy="1042416"/>
-          </a:xfrm>
-          <a:prstGeom prst="rect">
-            <a:avLst/>
-          </a:prstGeom>
-          <a:noFill/>
-          <a:ln/>
-        </p:spPr>
-        <p:txBody>
-          <a:bodyPr wrap="square" lIns="0" tIns="0" rIns="0" bIns="0" rtlCol="0" anchor="ctr"/>
-          <a:lstStyle/>
-          <a:p>
-            <a:pPr indent="0" marL="0">
-              <a:buNone/>
-            </a:pPr>
-            <a:r>
-              <a:rPr lang="en-US" sz="1500" i="1" dirty="0">
-                <a:solidFill>
-                  <a:srgbClr val="C9CBF0"/>
-                </a:solidFill>
-                <a:latin typeface="Inter" pitchFamily="34" charset="0"/>
-                <a:ea typeface="Inter" pitchFamily="34" charset="-122"/>
-                <a:cs typeface="Inter" pitchFamily="34" charset="-120"/>
-              </a:rPr>
-              <a:t>“Does this shop look real?”</a:t>
-            </a:r>
-            <a:endParaRPr lang="en-US" sz="1500" dirty="0"/>
-          </a:p>
-        </p:txBody>
-      </p:sp>
-      <p:sp>
-        <p:nvSpPr>
-          <p:cNvPr id="11" name="Text 8"/>
-          <p:cNvSpPr/>
-          <p:nvPr/>
-        </p:nvSpPr>
-        <p:spPr>
-          <a:xfrm>
-            <a:off x="4983480" y="2395728"/>
-            <a:ext cx="548640" cy="1042416"/>
-          </a:xfrm>
-          <a:prstGeom prst="rect">
-            <a:avLst/>
-          </a:prstGeom>
-          <a:noFill/>
-          <a:ln/>
-        </p:spPr>
-        <p:txBody>
-          <a:bodyPr wrap="square" lIns="0" tIns="0" rIns="0" bIns="0" rtlCol="0" anchor="ctr"/>
-          <a:lstStyle/>
-          <a:p>
-            <a:pPr algn="ctr" indent="0" marL="0">
-              <a:buNone/>
-            </a:pPr>
-            <a:r>
-              <a:rPr lang="en-US" sz="1500" dirty="0">
-                <a:solidFill>
-                  <a:srgbClr val="8B8AF0"/>
-                </a:solidFill>
-                <a:latin typeface="JetBrains Mono" pitchFamily="34" charset="0"/>
-                <a:ea typeface="JetBrains Mono" pitchFamily="34" charset="-122"/>
-                <a:cs typeface="JetBrains Mono" pitchFamily="34" charset="-120"/>
-              </a:rPr>
-              <a:t>→</a:t>
-            </a:r>
-            <a:endParaRPr lang="en-US" sz="1500" dirty="0"/>
-          </a:p>
-        </p:txBody>
-      </p:sp>
-      <p:sp>
-        <p:nvSpPr>
-          <p:cNvPr id="12" name="Text 9"/>
-          <p:cNvSpPr/>
-          <p:nvPr/>
-        </p:nvSpPr>
-        <p:spPr>
-          <a:xfrm>
-            <a:off x="5669280" y="2395728"/>
-            <a:ext cx="4480560" cy="1042416"/>
-          </a:xfrm>
-          <a:prstGeom prst="rect">
-            <a:avLst/>
-          </a:prstGeom>
-          <a:noFill/>
-          <a:ln/>
-        </p:spPr>
-        <p:txBody>
-          <a:bodyPr wrap="square" lIns="0" tIns="0" rIns="0" bIns="0" rtlCol="0" anchor="ctr"/>
-          <a:lstStyle/>
-          <a:p>
-            <a:pPr indent="0" marL="0">
-              <a:buNone/>
-            </a:pPr>
-            <a:r>
-              <a:rPr lang="en-US" sz="1650" b="1" dirty="0">
-                <a:solidFill>
-                  <a:srgbClr val="FFFFFF"/>
-                </a:solidFill>
-                <a:latin typeface="Inter" pitchFamily="34" charset="0"/>
-                <a:ea typeface="Inter" pitchFamily="34" charset="-122"/>
-                <a:cs typeface="Inter" pitchFamily="34" charset="-120"/>
-              </a:rPr>
-              <a:t>Is payTo really that agent's wallet?</a:t>
-            </a:r>
-            <a:endParaRPr lang="en-US" sz="1650" dirty="0"/>
-          </a:p>
-        </p:txBody>
-      </p:sp>
-      <p:sp>
-        <p:nvSpPr>
-          <p:cNvPr id="13" name="Text 10"/>
-          <p:cNvSpPr/>
-          <p:nvPr/>
-        </p:nvSpPr>
-        <p:spPr>
-          <a:xfrm>
-            <a:off x="9262872" y="2395728"/>
-            <a:ext cx="1737360" cy="1042416"/>
-          </a:xfrm>
-          <a:prstGeom prst="rect">
-            <a:avLst/>
-          </a:prstGeom>
-          <a:noFill/>
-          <a:ln/>
-        </p:spPr>
-        <p:txBody>
-          <a:bodyPr wrap="square" lIns="0" tIns="0" rIns="0" bIns="0" rtlCol="0" anchor="ctr"/>
-          <a:lstStyle/>
-          <a:p>
-            <a:pPr algn="r" indent="0" marL="0">
-              <a:buNone/>
-            </a:pPr>
-            <a:r>
-              <a:rPr lang="en-US" sz="1050" b="1" spc="140" kern="0" dirty="0">
-                <a:solidFill>
-                  <a:srgbClr val="3CCB8E"/>
-                </a:solidFill>
-                <a:latin typeface="JetBrains Mono" pitchFamily="34" charset="0"/>
-                <a:ea typeface="JetBrains Mono" pitchFamily="34" charset="-122"/>
-                <a:cs typeface="JetBrains Mono" pitchFamily="34" charset="-120"/>
-              </a:rPr>
-              <a:t>TODAY</a:t>
-            </a:r>
-            <a:endParaRPr lang="en-US" sz="1050" dirty="0"/>
-          </a:p>
-        </p:txBody>
-      </p:sp>
-      <p:sp>
-        <p:nvSpPr>
-          <p:cNvPr id="14" name="Shape 11"/>
-          <p:cNvSpPr/>
-          <p:nvPr/>
-        </p:nvSpPr>
-        <p:spPr>
-          <a:xfrm>
-            <a:off x="822960" y="3675888"/>
-            <a:ext cx="10543032" cy="1042416"/>
-          </a:xfrm>
-          <a:prstGeom prst="roundRect">
-            <a:avLst>
-              <a:gd name="adj" fmla="val 5263"/>
-            </a:avLst>
-          </a:prstGeom>
-          <a:solidFill>
-            <a:srgbClr val="F4F4F8"/>
-          </a:solidFill>
-          <a:ln w="12700">
-            <a:solidFill>
-              <a:srgbClr val="E4E5EC"/>
-            </a:solidFill>
-            <a:prstDash val="solid"/>
-          </a:ln>
-        </p:spPr>
-      </p:sp>
-      <p:sp>
-        <p:nvSpPr>
-          <p:cNvPr id="15" name="Text 12"/>
-          <p:cNvSpPr/>
-          <p:nvPr/>
-        </p:nvSpPr>
-        <p:spPr>
-          <a:xfrm>
-            <a:off x="1188720" y="3675888"/>
-            <a:ext cx="3749040" cy="1042416"/>
-          </a:xfrm>
-          <a:prstGeom prst="rect">
-            <a:avLst/>
-          </a:prstGeom>
-          <a:noFill/>
-          <a:ln/>
-        </p:spPr>
-        <p:txBody>
-          <a:bodyPr wrap="square" lIns="0" tIns="0" rIns="0" bIns="0" rtlCol="0" anchor="ctr"/>
-          <a:lstStyle/>
-          <a:p>
-            <a:pPr indent="0" marL="0">
-              <a:buNone/>
-            </a:pPr>
-            <a:r>
-              <a:rPr lang="en-US" sz="1500" i="1" dirty="0">
-                <a:solidFill>
-                  <a:srgbClr val="5B6170"/>
-                </a:solidFill>
-                <a:latin typeface="Inter" pitchFamily="34" charset="0"/>
-                <a:ea typeface="Inter" pitchFamily="34" charset="-122"/>
-                <a:cs typeface="Inter" pitchFamily="34" charset="-120"/>
-              </a:rPr>
-              <a:t>“I'm not spending more than X.”</a:t>
-            </a:r>
-            <a:endParaRPr lang="en-US" sz="1500" dirty="0"/>
-          </a:p>
-        </p:txBody>
-      </p:sp>
-      <p:sp>
-        <p:nvSpPr>
-          <p:cNvPr id="16" name="Text 13"/>
-          <p:cNvSpPr/>
-          <p:nvPr/>
-        </p:nvSpPr>
-        <p:spPr>
-          <a:xfrm>
-            <a:off x="4983480" y="3675888"/>
-            <a:ext cx="548640" cy="1042416"/>
-          </a:xfrm>
-          <a:prstGeom prst="rect">
-            <a:avLst/>
-          </a:prstGeom>
-          <a:noFill/>
-          <a:ln/>
-        </p:spPr>
-        <p:txBody>
-          <a:bodyPr wrap="square" lIns="0" tIns="0" rIns="0" bIns="0" rtlCol="0" anchor="ctr"/>
-          <a:lstStyle/>
-          <a:p>
-            <a:pPr algn="ctr" indent="0" marL="0">
-              <a:buNone/>
-            </a:pPr>
-            <a:r>
-              <a:rPr lang="en-US" sz="1500" dirty="0">
-                <a:solidFill>
-                  <a:srgbClr val="9AA0AE"/>
-                </a:solidFill>
-                <a:latin typeface="JetBrains Mono" pitchFamily="34" charset="0"/>
-                <a:ea typeface="JetBrains Mono" pitchFamily="34" charset="-122"/>
-                <a:cs typeface="JetBrains Mono" pitchFamily="34" charset="-120"/>
-              </a:rPr>
-              <a:t>→</a:t>
-            </a:r>
-            <a:endParaRPr lang="en-US" sz="1500" dirty="0"/>
-          </a:p>
-        </p:txBody>
-      </p:sp>
-      <p:sp>
-        <p:nvSpPr>
-          <p:cNvPr id="17" name="Text 14"/>
-          <p:cNvSpPr/>
-          <p:nvPr/>
-        </p:nvSpPr>
-        <p:spPr>
-          <a:xfrm>
-            <a:off x="5669280" y="3675888"/>
-            <a:ext cx="4480560" cy="1042416"/>
-          </a:xfrm>
-          <a:prstGeom prst="rect">
-            <a:avLst/>
-          </a:prstGeom>
-          <a:noFill/>
-          <a:ln/>
-        </p:spPr>
-        <p:txBody>
-          <a:bodyPr wrap="square" lIns="0" tIns="0" rIns="0" bIns="0" rtlCol="0" anchor="ctr"/>
-          <a:lstStyle/>
-          <a:p>
-            <a:pPr indent="0" marL="0">
-              <a:buNone/>
-            </a:pPr>
-            <a:r>
-              <a:rPr lang="en-US" sz="1650" b="1" dirty="0">
-                <a:solidFill>
-                  <a:srgbClr val="0E1116"/>
-                </a:solidFill>
-                <a:latin typeface="Inter" pitchFamily="34" charset="0"/>
-                <a:ea typeface="Inter" pitchFamily="34" charset="-122"/>
-                <a:cs typeface="Inter" pitchFamily="34" charset="-120"/>
-              </a:rPr>
-              <a:t>A cap the chain enforces.</a:t>
-            </a:r>
-            <a:endParaRPr lang="en-US" sz="1650" dirty="0"/>
-          </a:p>
-        </p:txBody>
-      </p:sp>
-      <p:sp>
-        <p:nvSpPr>
-          <p:cNvPr id="18" name="Text 15"/>
-          <p:cNvSpPr/>
-          <p:nvPr/>
-        </p:nvSpPr>
-        <p:spPr>
-          <a:xfrm>
-            <a:off x="9262872" y="3675888"/>
-            <a:ext cx="1737360" cy="1042416"/>
-          </a:xfrm>
-          <a:prstGeom prst="rect">
-            <a:avLst/>
-          </a:prstGeom>
-          <a:noFill/>
-          <a:ln/>
-        </p:spPr>
-        <p:txBody>
-          <a:bodyPr wrap="square" lIns="0" tIns="0" rIns="0" bIns="0" rtlCol="0" anchor="ctr"/>
-          <a:lstStyle/>
-          <a:p>
-            <a:pPr algn="r" indent="0" marL="0">
-              <a:buNone/>
-            </a:pPr>
-            <a:r>
-              <a:rPr lang="en-US" sz="1050" b="1" spc="140" kern="0" dirty="0">
-                <a:solidFill>
-                  <a:srgbClr val="9AA0AE"/>
-                </a:solidFill>
-                <a:latin typeface="JetBrains Mono" pitchFamily="34" charset="0"/>
-                <a:ea typeface="JetBrains Mono" pitchFamily="34" charset="-122"/>
-                <a:cs typeface="JetBrains Mono" pitchFamily="34" charset="-120"/>
-              </a:rPr>
-              <a:t>SESSION 8</a:t>
-            </a:r>
-            <a:endParaRPr lang="en-US" sz="1050" dirty="0"/>
-          </a:p>
-        </p:txBody>
-      </p:sp>
-      <p:sp>
-        <p:nvSpPr>
-          <p:cNvPr id="19" name="Shape 16"/>
-          <p:cNvSpPr/>
-          <p:nvPr/>
-        </p:nvSpPr>
-        <p:spPr>
-          <a:xfrm>
-            <a:off x="822960" y="4956048"/>
-            <a:ext cx="10543032" cy="1042416"/>
-          </a:xfrm>
-          <a:prstGeom prst="roundRect">
-            <a:avLst>
-              <a:gd name="adj" fmla="val 5263"/>
-            </a:avLst>
-          </a:prstGeom>
-          <a:solidFill>
-            <a:srgbClr val="F4F4F8"/>
-          </a:solidFill>
-          <a:ln w="12700">
-            <a:solidFill>
-              <a:srgbClr val="E4E5EC"/>
-            </a:solidFill>
-            <a:prstDash val="solid"/>
-          </a:ln>
-        </p:spPr>
-      </p:sp>
-      <p:sp>
-        <p:nvSpPr>
-          <p:cNvPr id="20" name="Text 17"/>
-          <p:cNvSpPr/>
-          <p:nvPr/>
-        </p:nvSpPr>
-        <p:spPr>
-          <a:xfrm>
-            <a:off x="1188720" y="4956048"/>
-            <a:ext cx="3749040" cy="1042416"/>
-          </a:xfrm>
-          <a:prstGeom prst="rect">
-            <a:avLst/>
-          </a:prstGeom>
-          <a:noFill/>
-          <a:ln/>
-        </p:spPr>
-        <p:txBody>
-          <a:bodyPr wrap="square" lIns="0" tIns="0" rIns="0" bIns="0" rtlCol="0" anchor="ctr"/>
-          <a:lstStyle/>
-          <a:p>
-            <a:pPr indent="0" marL="0">
-              <a:buNone/>
-            </a:pPr>
-            <a:r>
-              <a:rPr lang="en-US" sz="1500" i="1" dirty="0">
-                <a:solidFill>
-                  <a:srgbClr val="5B6170"/>
-                </a:solidFill>
-                <a:latin typeface="Inter" pitchFamily="34" charset="0"/>
-                <a:ea typeface="Inter" pitchFamily="34" charset="-122"/>
-                <a:cs typeface="Inter" pitchFamily="34" charset="-120"/>
-              </a:rPr>
-              <a:t>“I can get my money back.”</a:t>
-            </a:r>
-            <a:endParaRPr lang="en-US" sz="1500" dirty="0"/>
-          </a:p>
-        </p:txBody>
-      </p:sp>
-      <p:sp>
-        <p:nvSpPr>
-          <p:cNvPr id="21" name="Text 18"/>
-          <p:cNvSpPr/>
-          <p:nvPr/>
-        </p:nvSpPr>
-        <p:spPr>
-          <a:xfrm>
-            <a:off x="4983480" y="4956048"/>
-            <a:ext cx="548640" cy="1042416"/>
-          </a:xfrm>
-          <a:prstGeom prst="rect">
-            <a:avLst/>
-          </a:prstGeom>
-          <a:noFill/>
-          <a:ln/>
-        </p:spPr>
-        <p:txBody>
-          <a:bodyPr wrap="square" lIns="0" tIns="0" rIns="0" bIns="0" rtlCol="0" anchor="ctr"/>
-          <a:lstStyle/>
-          <a:p>
-            <a:pPr algn="ctr" indent="0" marL="0">
-              <a:buNone/>
-            </a:pPr>
-            <a:r>
-              <a:rPr lang="en-US" sz="1500" dirty="0">
-                <a:solidFill>
-                  <a:srgbClr val="9AA0AE"/>
-                </a:solidFill>
-                <a:latin typeface="JetBrains Mono" pitchFamily="34" charset="0"/>
-                <a:ea typeface="JetBrains Mono" pitchFamily="34" charset="-122"/>
-                <a:cs typeface="JetBrains Mono" pitchFamily="34" charset="-120"/>
-              </a:rPr>
-              <a:t>→</a:t>
-            </a:r>
-            <a:endParaRPr lang="en-US" sz="1500" dirty="0"/>
-          </a:p>
-        </p:txBody>
-      </p:sp>
-      <p:sp>
-        <p:nvSpPr>
-          <p:cNvPr id="22" name="Text 19"/>
-          <p:cNvSpPr/>
-          <p:nvPr/>
-        </p:nvSpPr>
-        <p:spPr>
-          <a:xfrm>
-            <a:off x="5669280" y="4956048"/>
-            <a:ext cx="4480560" cy="1042416"/>
-          </a:xfrm>
-          <a:prstGeom prst="rect">
-            <a:avLst/>
-          </a:prstGeom>
-          <a:noFill/>
-          <a:ln/>
-        </p:spPr>
-        <p:txBody>
-          <a:bodyPr wrap="square" lIns="0" tIns="0" rIns="0" bIns="0" rtlCol="0" anchor="ctr"/>
-          <a:lstStyle/>
-          <a:p>
-            <a:pPr indent="0" marL="0">
-              <a:buNone/>
-            </a:pPr>
-            <a:r>
-              <a:rPr lang="en-US" sz="1650" b="1" dirty="0">
-                <a:solidFill>
-                  <a:srgbClr val="0E1116"/>
-                </a:solidFill>
-                <a:latin typeface="Inter" pitchFamily="34" charset="0"/>
-                <a:ea typeface="Inter" pitchFamily="34" charset="-122"/>
-                <a:cs typeface="Inter" pitchFamily="34" charset="-120"/>
-              </a:rPr>
-              <a:t>Pay only on delivery.</a:t>
-            </a:r>
-            <a:endParaRPr lang="en-US" sz="1650" dirty="0"/>
-          </a:p>
-        </p:txBody>
-      </p:sp>
-      <p:sp>
-        <p:nvSpPr>
-          <p:cNvPr id="23" name="Text 20"/>
-          <p:cNvSpPr/>
-          <p:nvPr/>
-        </p:nvSpPr>
-        <p:spPr>
-          <a:xfrm>
-            <a:off x="9262872" y="4956048"/>
-            <a:ext cx="1737360" cy="1042416"/>
-          </a:xfrm>
-          <a:prstGeom prst="rect">
-            <a:avLst/>
-          </a:prstGeom>
-          <a:noFill/>
-          <a:ln/>
-        </p:spPr>
-        <p:txBody>
-          <a:bodyPr wrap="square" lIns="0" tIns="0" rIns="0" bIns="0" rtlCol="0" anchor="ctr"/>
-          <a:lstStyle/>
-          <a:p>
-            <a:pPr algn="r" indent="0" marL="0">
-              <a:buNone/>
-            </a:pPr>
-            <a:r>
-              <a:rPr lang="en-US" sz="1050" b="1" spc="140" kern="0" dirty="0">
-                <a:solidFill>
-                  <a:srgbClr val="9AA0AE"/>
-                </a:solidFill>
-                <a:latin typeface="JetBrains Mono" pitchFamily="34" charset="0"/>
-                <a:ea typeface="JetBrains Mono" pitchFamily="34" charset="-122"/>
-                <a:cs typeface="JetBrains Mono" pitchFamily="34" charset="-120"/>
-              </a:rPr>
-              <a:t>SESSION 9</a:t>
-            </a:r>
-            <a:endParaRPr lang="en-US" sz="1050" dirty="0"/>
           </a:p>
         </p:txBody>
       </p:sp>
@@ -4439,7 +3408,7 @@
                 <a:ea typeface="JetBrains Mono" pitchFamily="34" charset="-122"/>
                 <a:cs typeface="JetBrains Mono" pitchFamily="34" charset="-120"/>
               </a:rPr>
-              <a:t>MOI · BUILD 04</a:t>
+              <a:t>MOI · BUILD 03</a:t>
             </a:r>
             <a:endParaRPr lang="en-US" sz="1000" dirty="0"/>
           </a:p>
@@ -4545,7 +3514,7 @@
                 <a:ea typeface="JetBrains Mono" pitchFamily="34" charset="-122"/>
                 <a:cs typeface="JetBrains Mono" pitchFamily="34" charset="-120"/>
               </a:rPr>
-              <a:t>04 / 8</a:t>
+              <a:t>03 / 7</a:t>
             </a:r>
             <a:endParaRPr lang="en-US" sz="900" dirty="0"/>
           </a:p>
@@ -5498,7 +4467,7 @@
                 <a:ea typeface="JetBrains Mono" pitchFamily="34" charset="-122"/>
                 <a:cs typeface="JetBrains Mono" pitchFamily="34" charset="-120"/>
               </a:rPr>
-              <a:t>MOI · BUILD 05</a:t>
+              <a:t>MOI · BUILD 04</a:t>
             </a:r>
             <a:endParaRPr lang="en-US" sz="1000" dirty="0"/>
           </a:p>
@@ -5615,7 +4584,7 @@
                 <a:ea typeface="JetBrains Mono" pitchFamily="34" charset="-122"/>
                 <a:cs typeface="JetBrains Mono" pitchFamily="34" charset="-120"/>
               </a:rPr>
-              <a:t>05 / 8</a:t>
+              <a:t>04 / 7</a:t>
             </a:r>
             <a:endParaRPr lang="en-US" sz="900" dirty="0"/>
           </a:p>
@@ -6352,7 +5321,7 @@
                 <a:ea typeface="JetBrains Mono" pitchFamily="34" charset="-122"/>
                 <a:cs typeface="JetBrains Mono" pitchFamily="34" charset="-120"/>
               </a:rPr>
-              <a:t>MOI · BUILD 06</a:t>
+              <a:t>MOI · BUILD 05</a:t>
             </a:r>
             <a:endParaRPr lang="en-US" sz="1000" dirty="0"/>
           </a:p>
@@ -6469,7 +5438,7 @@
                 <a:ea typeface="JetBrains Mono" pitchFamily="34" charset="-122"/>
                 <a:cs typeface="JetBrains Mono" pitchFamily="34" charset="-120"/>
               </a:rPr>
-              <a:t>06 / 8</a:t>
+              <a:t>05 / 7</a:t>
             </a:r>
             <a:endParaRPr lang="en-US" sz="900" dirty="0"/>
           </a:p>
@@ -7110,7 +6079,7 @@
                 <a:ea typeface="JetBrains Mono" pitchFamily="34" charset="-122"/>
                 <a:cs typeface="JetBrains Mono" pitchFamily="34" charset="-120"/>
               </a:rPr>
-              <a:t>MOI · BUILD 07</a:t>
+              <a:t>MOI · BUILD 06</a:t>
             </a:r>
             <a:endParaRPr lang="en-US" sz="1000" dirty="0"/>
           </a:p>
@@ -7227,7 +6196,7 @@
                 <a:ea typeface="JetBrains Mono" pitchFamily="34" charset="-122"/>
                 <a:cs typeface="JetBrains Mono" pitchFamily="34" charset="-120"/>
               </a:rPr>
-              <a:t>07 / 8</a:t>
+              <a:t>06 / 7</a:t>
             </a:r>
             <a:endParaRPr lang="en-US" sz="900" dirty="0"/>
           </a:p>
@@ -7925,7 +6894,7 @@
                 <a:ea typeface="JetBrains Mono" pitchFamily="34" charset="-122"/>
                 <a:cs typeface="JetBrains Mono" pitchFamily="34" charset="-120"/>
               </a:rPr>
-              <a:t>MOI · BUILD 08</a:t>
+              <a:t>MOI · BUILD 07</a:t>
             </a:r>
             <a:endParaRPr lang="en-US" sz="1000" dirty="0"/>
           </a:p>
@@ -8042,7 +7011,7 @@
                 <a:ea typeface="JetBrains Mono" pitchFamily="34" charset="-122"/>
                 <a:cs typeface="JetBrains Mono" pitchFamily="34" charset="-120"/>
               </a:rPr>
-              <a:t>08 / 8</a:t>
+              <a:t>07 / 7</a:t>
             </a:r>
             <a:endParaRPr lang="en-US" sz="900" dirty="0"/>
           </a:p>

--- a/session-7/deck/MOI_Builders_S7-new.pptx
+++ b/session-7/deck/MOI_Builders_S7-new.pptx
@@ -5727,7 +5727,7 @@
                 <a:ea typeface="JetBrains Mono" pitchFamily="34" charset="-122"/>
                 <a:cs typeface="JetBrains Mono" pitchFamily="34" charset="-120"/>
               </a:rPr>
-              <a:t>REMOVABLE</a:t>
+              <a:t>THE REAL PROBLEM</a:t>
             </a:r>
             <a:endParaRPr lang="en-US" sz="950" dirty="0"/>
           </a:p>
@@ -5766,7 +5766,7 @@
                 <a:ea typeface="Inter" pitchFamily="34" charset="-122"/>
                 <a:cs typeface="Inter" pitchFamily="34" charset="-120"/>
               </a:rPr>
-              <a:t>One environment variable</a:t>
+              <a:t>The lock is inside the house</a:t>
             </a:r>
             <a:endParaRPr lang="en-US" sz="1800" dirty="0"/>
           </a:p>
@@ -5808,7 +5808,7 @@
                 <a:ea typeface="Inter" pitchFamily="34" charset="-122"/>
                 <a:cs typeface="Inter" pitchFamily="34" charset="-120"/>
               </a:rPr>
-              <a:t>Set MAX_PRICE_PER_ANSWER and the ceiling is gone — no code change. The model's second opinion is also just a prompt, in a file the operator controls.</a:t>
+              <a:t>One env var removes the limit; the model's second opinion is a prompt the operator owns. If the agent is compromised, its guardrails go with it — and nobody outside can even see what they were.</a:t>
             </a:r>
             <a:endParaRPr lang="en-US" sz="1300" dirty="0"/>
           </a:p>
@@ -5874,7 +5874,7 @@
                 <a:ea typeface="JetBrains Mono" pitchFamily="34" charset="-122"/>
                 <a:cs typeface="JetBrains Mono" pitchFamily="34" charset="-120"/>
               </a:rPr>
-              <a:t>WORSE</a:t>
+              <a:t>EVEN WHEN IT HOLDS</a:t>
             </a:r>
             <a:endParaRPr lang="en-US" sz="950" dirty="0"/>
           </a:p>
@@ -5913,7 +5913,7 @@
                 <a:ea typeface="Inter" pitchFamily="34" charset="-122"/>
                 <a:cs typeface="Inter" pitchFamily="34" charset="-120"/>
               </a:rPr>
-              <a:t>It caps per purchase, not in total</a:t>
+              <a:t>It caps the purchase, not the wallet</a:t>
             </a:r>
             <a:endParaRPr lang="en-US" sz="1800" dirty="0"/>
           </a:p>
@@ -5955,7 +5955,7 @@
                 <a:ea typeface="Inter" pitchFamily="34" charset="-122"/>
                 <a:cs typeface="Inter" pitchFamily="34" charset="-120"/>
               </a:rPr>
-              <a:t>Nothing tracks cumulative spend. An agent with a 6-unit limit can still drain 99,000 — six at a time — without breaking its limit once.</a:t>
+              <a:t>Nothing tracks the total. A 6-unit limit with a 99,000 balance drains the wallet six at a time — every purchase compliant. The wallet still empties.</a:t>
             </a:r>
             <a:endParaRPr lang="en-US" sz="1300" dirty="0"/>
           </a:p>
@@ -6009,6 +6009,18 @@
                 <a:cs typeface="Inter" pitchFamily="34" charset="-120"/>
               </a:rPr>
               <a:t>A limit the chain applies is authority.</a:t>
+            </a:r>
+            <a:br/>
+            <a:r>
+              <a:rPr lang="en-US" sz="1700" b="1" dirty="0">
+                <a:solidFill>
+                  <a:srgbClr val="2D2BB6"/>
+                </a:solidFill>
+                <a:latin typeface="Inter" pitchFamily="34" charset="0"/>
+                <a:ea typeface="Inter" pitchFamily="34" charset="-122"/>
+                <a:cs typeface="Inter" pitchFamily="34" charset="-120"/>
+              </a:rPr>
+              <a:t>MOI is that authority layer — a scope the agent inherits, on chain.  →  Session 8</a:t>
             </a:r>
             <a:endParaRPr lang="en-US" sz="1700" dirty="0"/>
           </a:p>

--- a/session-7/deck/MOI_Builders_S7-new.pptx
+++ b/session-7/deck/MOI_Builders_S7-new.pptx
@@ -4623,7 +4623,7 @@
                 <a:ea typeface="Inter" pitchFamily="34" charset="-122"/>
                 <a:cs typeface="Inter" pitchFamily="34" charset="-120"/>
               </a:rPr>
-              <a:t>Four files</a:t>
+              <a:t>Seven files</a:t>
             </a:r>
             <a:endParaRPr lang="en-US" sz="3800" dirty="0"/>
           </a:p>
@@ -4670,589 +4670,925 @@
       </p:sp>
       <p:sp>
         <p:nvSpPr>
-          <p:cNvPr id="9" name="Shape 6"/>
-          <p:cNvSpPr/>
-          <p:nvPr/>
-        </p:nvSpPr>
-        <p:spPr>
-          <a:xfrm>
-            <a:off x="822960" y="2395728"/>
-            <a:ext cx="5042916" cy="1572768"/>
+          <p:cNvPr id="701" name="card701"/>
+          <p:cNvSpPr/>
+          <p:nvPr/>
+        </p:nvSpPr>
+        <p:spPr>
+          <a:xfrm>
+            <a:off x="822960" y="2121408"/>
+            <a:ext cx="5120640" cy="914400"/>
           </a:xfrm>
           <a:prstGeom prst="roundRect">
             <a:avLst>
-              <a:gd name="adj" fmla="val 3488"/>
+              <a:gd name="adj" fmla="val 6500"/>
             </a:avLst>
           </a:prstGeom>
           <a:solidFill>
-            <a:srgbClr val="1C212B"/>
+            <a:srgbClr val="141821"/>
           </a:solidFill>
           <a:ln w="12700">
             <a:solidFill>
-              <a:srgbClr val="363C49"/>
+              <a:srgbClr val="2A2E37"/>
             </a:solidFill>
-            <a:prstDash val="solid"/>
           </a:ln>
         </p:spPr>
-      </p:sp>
-      <p:sp>
-        <p:nvSpPr>
-          <p:cNvPr id="10" name="Text 7"/>
-          <p:cNvSpPr/>
-          <p:nvPr/>
-        </p:nvSpPr>
-        <p:spPr>
-          <a:xfrm>
-            <a:off x="4951476" y="2633472"/>
-            <a:ext cx="640080" cy="237744"/>
-          </a:xfrm>
-          <a:prstGeom prst="rect">
-            <a:avLst/>
-          </a:prstGeom>
-          <a:noFill/>
-          <a:ln/>
-        </p:spPr>
-        <p:txBody>
-          <a:bodyPr wrap="square" lIns="0" tIns="0" rIns="0" bIns="0" rtlCol="0" anchor="ctr"/>
-          <a:lstStyle/>
-          <a:p>
-            <a:pPr algn="r" indent="0" marL="0">
-              <a:buNone/>
-            </a:pPr>
+        <p:txBody>
+          <a:bodyPr/>
+          <a:lstStyle/>
+          <a:p>
+            <a:endParaRPr lang="en-US"/>
+          </a:p>
+        </p:txBody>
+      </p:sp>
+      <p:sp>
+        <p:nvSpPr>
+          <p:cNvPr id="702" name="t702"/>
+          <p:cNvSpPr txBox="1"/>
+          <p:nvPr/>
+        </p:nvSpPr>
+        <p:spPr>
+          <a:xfrm>
+            <a:off x="5074920" y="2212848"/>
+            <a:ext cx="594360" cy="256032"/>
+          </a:xfrm>
+          <a:prstGeom prst="rect">
+            <a:avLst/>
+          </a:prstGeom>
+          <a:noFill/>
+        </p:spPr>
+        <p:txBody>
+          <a:bodyPr lIns="0" tIns="0" rIns="0" bIns="0"/>
+          <a:lstStyle/>
+          <a:p>
+            <a:pPr algn="r"/>
             <a:r>
               <a:rPr lang="en-US" sz="1000" dirty="0">
                 <a:solidFill>
-                  <a:srgbClr val="3A404D"/>
-                </a:solidFill>
-                <a:latin typeface="JetBrains Mono" pitchFamily="34" charset="0"/>
-                <a:ea typeface="JetBrains Mono" pitchFamily="34" charset="-122"/>
-                <a:cs typeface="JetBrains Mono" pitchFamily="34" charset="-120"/>
+                  <a:srgbClr val="6B7280"/>
+                </a:solidFill>
+                <a:latin typeface="JetBrains Mono"/>
               </a:rPr>
               <a:t>01</a:t>
             </a:r>
-            <a:endParaRPr lang="en-US" sz="1000" dirty="0"/>
-          </a:p>
-        </p:txBody>
-      </p:sp>
-      <p:sp>
-        <p:nvSpPr>
-          <p:cNvPr id="11" name="Text 8"/>
-          <p:cNvSpPr/>
-          <p:nvPr/>
-        </p:nvSpPr>
-        <p:spPr>
-          <a:xfrm>
-            <a:off x="1152144" y="2724912"/>
-            <a:ext cx="3854196" cy="384048"/>
-          </a:xfrm>
-          <a:prstGeom prst="rect">
-            <a:avLst/>
-          </a:prstGeom>
-          <a:noFill/>
-          <a:ln/>
-        </p:spPr>
-        <p:txBody>
-          <a:bodyPr wrap="square" lIns="0" tIns="0" rIns="0" bIns="0" rtlCol="0" anchor="ctr"/>
-          <a:lstStyle/>
-          <a:p>
-            <a:pPr indent="0" marL="0">
-              <a:buNone/>
-            </a:pPr>
-            <a:r>
-              <a:rPr lang="en-US" sz="1800" b="1" dirty="0">
+          </a:p>
+        </p:txBody>
+      </p:sp>
+      <p:sp>
+        <p:nvSpPr>
+          <p:cNvPr id="703" name="t703"/>
+          <p:cNvSpPr txBox="1"/>
+          <p:nvPr/>
+        </p:nvSpPr>
+        <p:spPr>
+          <a:xfrm>
+            <a:off x="1078992" y="2231136"/>
+            <a:ext cx="3886200" cy="292608"/>
+          </a:xfrm>
+          <a:prstGeom prst="rect">
+            <a:avLst/>
+          </a:prstGeom>
+          <a:noFill/>
+        </p:spPr>
+        <p:txBody>
+          <a:bodyPr lIns="0" tIns="0" rIns="0" bIns="0"/>
+          <a:lstStyle/>
+          <a:p>
+            <a:pPr algn="l"/>
+            <a:r>
+              <a:rPr lang="en-US" sz="1400" b="1" dirty="0">
                 <a:solidFill>
                   <a:srgbClr val="FFFFFF"/>
                 </a:solidFill>
-                <a:latin typeface="JetBrains Mono" pitchFamily="34" charset="0"/>
-                <a:ea typeface="JetBrains Mono" pitchFamily="34" charset="-122"/>
-                <a:cs typeface="JetBrains Mono" pitchFamily="34" charset="-120"/>
-              </a:rPr>
-              <a:t>payment-proof.ts</a:t>
-            </a:r>
-            <a:endParaRPr lang="en-US" sz="1800" dirty="0"/>
-          </a:p>
-        </p:txBody>
-      </p:sp>
-      <p:sp>
-        <p:nvSpPr>
-          <p:cNvPr id="12" name="Text 9"/>
-          <p:cNvSpPr/>
-          <p:nvPr/>
-        </p:nvSpPr>
-        <p:spPr>
-          <a:xfrm>
-            <a:off x="1152144" y="3236976"/>
-            <a:ext cx="4384548" cy="548640"/>
-          </a:xfrm>
-          <a:prstGeom prst="rect">
-            <a:avLst/>
-          </a:prstGeom>
-          <a:noFill/>
-          <a:ln/>
-        </p:spPr>
-        <p:txBody>
-          <a:bodyPr wrap="square" lIns="0" tIns="0" rIns="0" bIns="0" rtlCol="0" anchor="ctr"/>
-          <a:lstStyle/>
-          <a:p>
-            <a:pPr indent="0" marL="0">
-              <a:lnSpc>
-                <a:spcPts val="2000"/>
-              </a:lnSpc>
-              <a:buNone/>
-            </a:pPr>
-            <a:r>
-              <a:rPr lang="en-US" sz="1400" dirty="0">
+                <a:latin typeface="Inter"/>
+              </a:rPr>
+              <a:t>registry.ts</a:t>
+            </a:r>
+          </a:p>
+        </p:txBody>
+      </p:sp>
+      <p:sp>
+        <p:nvSpPr>
+          <p:cNvPr id="704" name="t704"/>
+          <p:cNvSpPr txBox="1"/>
+          <p:nvPr/>
+        </p:nvSpPr>
+        <p:spPr>
+          <a:xfrm>
+            <a:off x="1078992" y="2578608"/>
+            <a:ext cx="4608575" cy="402336"/>
+          </a:xfrm>
+          <a:prstGeom prst="rect">
+            <a:avLst/>
+          </a:prstGeom>
+          <a:noFill/>
+        </p:spPr>
+        <p:txBody>
+          <a:bodyPr lIns="0" tIns="0" rIns="0" bIns="0"/>
+          <a:lstStyle/>
+          <a:p>
+            <a:pPr algn="l"/>
+            <a:r>
+              <a:rPr lang="en-US" sz="1050" dirty="0">
                 <a:solidFill>
                   <a:srgbClr val="B9BECD"/>
                 </a:solidFill>
-                <a:latin typeface="Inter" pitchFamily="34" charset="0"/>
-                <a:ea typeface="Inter" pitchFamily="34" charset="-122"/>
-                <a:cs typeface="Inter" pitchFamily="34" charset="-120"/>
-              </a:rPr>
-              <a:t>the whole wire format — a quote, and a signed claim</a:t>
-            </a:r>
-            <a:endParaRPr lang="en-US" sz="1400" dirty="0"/>
-          </a:p>
-        </p:txBody>
-      </p:sp>
-      <p:sp>
-        <p:nvSpPr>
-          <p:cNvPr id="13" name="Shape 10"/>
-          <p:cNvSpPr/>
-          <p:nvPr/>
-        </p:nvSpPr>
-        <p:spPr>
-          <a:xfrm>
-            <a:off x="6323076" y="2395728"/>
-            <a:ext cx="5042916" cy="1572768"/>
+                <a:latin typeface="Inter"/>
+              </a:rPr>
+              <a:t>finds the seller — scans the on-chain agent cards for a skill tag, comes back with an id, a wallet and a URL</a:t>
+            </a:r>
+          </a:p>
+        </p:txBody>
+      </p:sp>
+      <p:sp>
+        <p:nvSpPr>
+          <p:cNvPr id="705" name="card705"/>
+          <p:cNvSpPr/>
+          <p:nvPr/>
+        </p:nvSpPr>
+        <p:spPr>
+          <a:xfrm>
+            <a:off x="6245352" y="2121408"/>
+            <a:ext cx="5120640" cy="914400"/>
           </a:xfrm>
           <a:prstGeom prst="roundRect">
             <a:avLst>
-              <a:gd name="adj" fmla="val 3488"/>
+              <a:gd name="adj" fmla="val 6500"/>
             </a:avLst>
           </a:prstGeom>
           <a:solidFill>
-            <a:srgbClr val="10221B"/>
+            <a:srgbClr val="141821"/>
           </a:solidFill>
-          <a:ln w="15875">
+          <a:ln w="12700">
+            <a:solidFill>
+              <a:srgbClr val="2A2E37"/>
+            </a:solidFill>
+          </a:ln>
+        </p:spPr>
+        <p:txBody>
+          <a:bodyPr/>
+          <a:lstStyle/>
+          <a:p>
+            <a:endParaRPr lang="en-US"/>
+          </a:p>
+        </p:txBody>
+      </p:sp>
+      <p:sp>
+        <p:nvSpPr>
+          <p:cNvPr id="706" name="t706"/>
+          <p:cNvSpPr txBox="1"/>
+          <p:nvPr/>
+        </p:nvSpPr>
+        <p:spPr>
+          <a:xfrm>
+            <a:off x="10497312" y="2212848"/>
+            <a:ext cx="594360" cy="256032"/>
+          </a:xfrm>
+          <a:prstGeom prst="rect">
+            <a:avLst/>
+          </a:prstGeom>
+          <a:noFill/>
+        </p:spPr>
+        <p:txBody>
+          <a:bodyPr lIns="0" tIns="0" rIns="0" bIns="0"/>
+          <a:lstStyle/>
+          <a:p>
+            <a:pPr algn="r"/>
+            <a:r>
+              <a:rPr lang="en-US" sz="1000" dirty="0">
+                <a:solidFill>
+                  <a:srgbClr val="6B7280"/>
+                </a:solidFill>
+                <a:latin typeface="JetBrains Mono"/>
+              </a:rPr>
+              <a:t>02</a:t>
+            </a:r>
+          </a:p>
+        </p:txBody>
+      </p:sp>
+      <p:sp>
+        <p:nvSpPr>
+          <p:cNvPr id="707" name="t707"/>
+          <p:cNvSpPr txBox="1"/>
+          <p:nvPr/>
+        </p:nvSpPr>
+        <p:spPr>
+          <a:xfrm>
+            <a:off x="6501384" y="2231136"/>
+            <a:ext cx="3886200" cy="292608"/>
+          </a:xfrm>
+          <a:prstGeom prst="rect">
+            <a:avLst/>
+          </a:prstGeom>
+          <a:noFill/>
+        </p:spPr>
+        <p:txBody>
+          <a:bodyPr lIns="0" tIns="0" rIns="0" bIns="0"/>
+          <a:lstStyle/>
+          <a:p>
+            <a:pPr algn="l"/>
+            <a:r>
+              <a:rPr lang="en-US" sz="1400" b="1" dirty="0">
+                <a:solidFill>
+                  <a:srgbClr val="FFFFFF"/>
+                </a:solidFill>
+                <a:latin typeface="Inter"/>
+              </a:rPr>
+              <a:t>index.ts</a:t>
+            </a:r>
+          </a:p>
+        </p:txBody>
+      </p:sp>
+      <p:sp>
+        <p:nvSpPr>
+          <p:cNvPr id="708" name="t708"/>
+          <p:cNvSpPr txBox="1"/>
+          <p:nvPr/>
+        </p:nvSpPr>
+        <p:spPr>
+          <a:xfrm>
+            <a:off x="6501384" y="2578608"/>
+            <a:ext cx="4608575" cy="402336"/>
+          </a:xfrm>
+          <a:prstGeom prst="rect">
+            <a:avLst/>
+          </a:prstGeom>
+          <a:noFill/>
+        </p:spPr>
+        <p:txBody>
+          <a:bodyPr lIns="0" tIns="0" rIns="0" bIns="0"/>
+          <a:lstStyle/>
+          <a:p>
+            <a:pPr algn="l"/>
+            <a:r>
+              <a:rPr lang="en-US" sz="1050" dirty="0">
+                <a:solidFill>
+                  <a:srgbClr val="B9BECD"/>
+                </a:solidFill>
+                <a:latin typeface="Inter"/>
+              </a:rPr>
+              <a:t>the shopfront — a plain web server: the catalog is free to browse, the answer sits behind a paywall</a:t>
+            </a:r>
+          </a:p>
+        </p:txBody>
+      </p:sp>
+      <p:sp>
+        <p:nvSpPr>
+          <p:cNvPr id="709" name="card709"/>
+          <p:cNvSpPr/>
+          <p:nvPr/>
+        </p:nvSpPr>
+        <p:spPr>
+          <a:xfrm>
+            <a:off x="822960" y="3145536"/>
+            <a:ext cx="5120640" cy="914400"/>
+          </a:xfrm>
+          <a:prstGeom prst="roundRect">
+            <a:avLst>
+              <a:gd name="adj" fmla="val 6500"/>
+            </a:avLst>
+          </a:prstGeom>
+          <a:solidFill>
+            <a:srgbClr val="141821"/>
+          </a:solidFill>
+          <a:ln w="12700">
+            <a:solidFill>
+              <a:srgbClr val="2A2E37"/>
+            </a:solidFill>
+          </a:ln>
+        </p:spPr>
+        <p:txBody>
+          <a:bodyPr/>
+          <a:lstStyle/>
+          <a:p>
+            <a:endParaRPr lang="en-US"/>
+          </a:p>
+        </p:txBody>
+      </p:sp>
+      <p:sp>
+        <p:nvSpPr>
+          <p:cNvPr id="710" name="t710"/>
+          <p:cNvSpPr txBox="1"/>
+          <p:nvPr/>
+        </p:nvSpPr>
+        <p:spPr>
+          <a:xfrm>
+            <a:off x="5074920" y="3236976"/>
+            <a:ext cx="594360" cy="256032"/>
+          </a:xfrm>
+          <a:prstGeom prst="rect">
+            <a:avLst/>
+          </a:prstGeom>
+          <a:noFill/>
+        </p:spPr>
+        <p:txBody>
+          <a:bodyPr lIns="0" tIns="0" rIns="0" bIns="0"/>
+          <a:lstStyle/>
+          <a:p>
+            <a:pPr algn="r"/>
+            <a:r>
+              <a:rPr lang="en-US" sz="1000" dirty="0">
+                <a:solidFill>
+                  <a:srgbClr val="6B7280"/>
+                </a:solidFill>
+                <a:latin typeface="JetBrains Mono"/>
+              </a:rPr>
+              <a:t>03</a:t>
+            </a:r>
+          </a:p>
+        </p:txBody>
+      </p:sp>
+      <p:sp>
+        <p:nvSpPr>
+          <p:cNvPr id="711" name="t711"/>
+          <p:cNvSpPr txBox="1"/>
+          <p:nvPr/>
+        </p:nvSpPr>
+        <p:spPr>
+          <a:xfrm>
+            <a:off x="1078992" y="3255264"/>
+            <a:ext cx="3886200" cy="292608"/>
+          </a:xfrm>
+          <a:prstGeom prst="rect">
+            <a:avLst/>
+          </a:prstGeom>
+          <a:noFill/>
+        </p:spPr>
+        <p:txBody>
+          <a:bodyPr lIns="0" tIns="0" rIns="0" bIns="0"/>
+          <a:lstStyle/>
+          <a:p>
+            <a:pPr algn="l"/>
+            <a:r>
+              <a:rPr lang="en-US" sz="1400" b="1" dirty="0">
+                <a:solidFill>
+                  <a:srgbClr val="FFFFFF"/>
+                </a:solidFill>
+                <a:latin typeface="Inter"/>
+              </a:rPr>
+              <a:t>paywall.ts</a:t>
+            </a:r>
+          </a:p>
+        </p:txBody>
+      </p:sp>
+      <p:sp>
+        <p:nvSpPr>
+          <p:cNvPr id="712" name="t712"/>
+          <p:cNvSpPr txBox="1"/>
+          <p:nvPr/>
+        </p:nvSpPr>
+        <p:spPr>
+          <a:xfrm>
+            <a:off x="1078992" y="3602736"/>
+            <a:ext cx="4608575" cy="402336"/>
+          </a:xfrm>
+          <a:prstGeom prst="rect">
+            <a:avLst/>
+          </a:prstGeom>
+          <a:noFill/>
+        </p:spPr>
+        <p:txBody>
+          <a:bodyPr lIns="0" tIns="0" rIns="0" bIns="0"/>
+          <a:lstStyle/>
+          <a:p>
+            <a:pPr algn="l"/>
+            <a:r>
+              <a:rPr lang="en-US" sz="1050" dirty="0">
+                <a:solidFill>
+                  <a:srgbClr val="B9BECD"/>
+                </a:solidFill>
+                <a:latin typeface="Inter"/>
+              </a:rPr>
+              <a:t>the tollgate — no proof of payment? reply 402 with a quote. proof checks out? ship the answer</a:t>
+            </a:r>
+          </a:p>
+        </p:txBody>
+      </p:sp>
+      <p:sp>
+        <p:nvSpPr>
+          <p:cNvPr id="713" name="card713"/>
+          <p:cNvSpPr/>
+          <p:nvPr/>
+        </p:nvSpPr>
+        <p:spPr>
+          <a:xfrm>
+            <a:off x="6245352" y="3145536"/>
+            <a:ext cx="5120640" cy="914400"/>
+          </a:xfrm>
+          <a:prstGeom prst="roundRect">
+            <a:avLst>
+              <a:gd name="adj" fmla="val 6500"/>
+            </a:avLst>
+          </a:prstGeom>
+          <a:solidFill>
+            <a:srgbClr val="141821"/>
+          </a:solidFill>
+          <a:ln w="12700">
+            <a:solidFill>
+              <a:srgbClr val="2A2E37"/>
+            </a:solidFill>
+          </a:ln>
+        </p:spPr>
+        <p:txBody>
+          <a:bodyPr/>
+          <a:lstStyle/>
+          <a:p>
+            <a:endParaRPr lang="en-US"/>
+          </a:p>
+        </p:txBody>
+      </p:sp>
+      <p:sp>
+        <p:nvSpPr>
+          <p:cNvPr id="714" name="t714"/>
+          <p:cNvSpPr txBox="1"/>
+          <p:nvPr/>
+        </p:nvSpPr>
+        <p:spPr>
+          <a:xfrm>
+            <a:off x="10497312" y="3236976"/>
+            <a:ext cx="594360" cy="256032"/>
+          </a:xfrm>
+          <a:prstGeom prst="rect">
+            <a:avLst/>
+          </a:prstGeom>
+          <a:noFill/>
+        </p:spPr>
+        <p:txBody>
+          <a:bodyPr lIns="0" tIns="0" rIns="0" bIns="0"/>
+          <a:lstStyle/>
+          <a:p>
+            <a:pPr algn="r"/>
+            <a:r>
+              <a:rPr lang="en-US" sz="1000" dirty="0">
+                <a:solidFill>
+                  <a:srgbClr val="6B7280"/>
+                </a:solidFill>
+                <a:latin typeface="JetBrains Mono"/>
+              </a:rPr>
+              <a:t>04</a:t>
+            </a:r>
+          </a:p>
+        </p:txBody>
+      </p:sp>
+      <p:sp>
+        <p:nvSpPr>
+          <p:cNvPr id="715" name="t715"/>
+          <p:cNvSpPr txBox="1"/>
+          <p:nvPr/>
+        </p:nvSpPr>
+        <p:spPr>
+          <a:xfrm>
+            <a:off x="6501384" y="3255264"/>
+            <a:ext cx="3886200" cy="292608"/>
+          </a:xfrm>
+          <a:prstGeom prst="rect">
+            <a:avLst/>
+          </a:prstGeom>
+          <a:noFill/>
+        </p:spPr>
+        <p:txBody>
+          <a:bodyPr lIns="0" tIns="0" rIns="0" bIns="0"/>
+          <a:lstStyle/>
+          <a:p>
+            <a:pPr algn="l"/>
+            <a:r>
+              <a:rPr lang="en-US" sz="1400" b="1" dirty="0">
+                <a:solidFill>
+                  <a:srgbClr val="FFFFFF"/>
+                </a:solidFill>
+                <a:latin typeface="Inter"/>
+              </a:rPr>
+              <a:t>pricing.ts + worth.ts</a:t>
+            </a:r>
+          </a:p>
+        </p:txBody>
+      </p:sp>
+      <p:sp>
+        <p:nvSpPr>
+          <p:cNvPr id="716" name="t716"/>
+          <p:cNvSpPr txBox="1"/>
+          <p:nvPr/>
+        </p:nvSpPr>
+        <p:spPr>
+          <a:xfrm>
+            <a:off x="6501384" y="3602736"/>
+            <a:ext cx="4608575" cy="402336"/>
+          </a:xfrm>
+          <a:prstGeom prst="rect">
+            <a:avLst/>
+          </a:prstGeom>
+          <a:noFill/>
+        </p:spPr>
+        <p:txBody>
+          <a:bodyPr lIns="0" tIns="0" rIns="0" bIns="0"/>
+          <a:lstStyle/>
+          <a:p>
+            <a:pPr algn="l"/>
+            <a:r>
+              <a:rPr lang="en-US" sz="1050" dirty="0">
+                <a:solidFill>
+                  <a:srgbClr val="B9BECD"/>
+                </a:solidFill>
+                <a:latin typeface="Inter"/>
+              </a:rPr>
+              <a:t>the money brains — seller decides what to charge, buyer decides if it's worth it, inside bounds neither model controls</a:t>
+            </a:r>
+          </a:p>
+        </p:txBody>
+      </p:sp>
+      <p:sp>
+        <p:nvSpPr>
+          <p:cNvPr id="717" name="card717"/>
+          <p:cNvSpPr/>
+          <p:nvPr/>
+        </p:nvSpPr>
+        <p:spPr>
+          <a:xfrm>
+            <a:off x="822960" y="4169664"/>
+            <a:ext cx="5120640" cy="914400"/>
+          </a:xfrm>
+          <a:prstGeom prst="roundRect">
+            <a:avLst>
+              <a:gd name="adj" fmla="val 6500"/>
+            </a:avLst>
+          </a:prstGeom>
+          <a:solidFill>
+            <a:srgbClr val="0C1A15"/>
+          </a:solidFill>
+          <a:ln w="12700">
             <a:solidFill>
               <a:srgbClr val="3CCB8E"/>
             </a:solidFill>
-            <a:prstDash val="solid"/>
           </a:ln>
         </p:spPr>
-      </p:sp>
-      <p:sp>
-        <p:nvSpPr>
-          <p:cNvPr id="14" name="Text 11"/>
-          <p:cNvSpPr/>
-          <p:nvPr/>
-        </p:nvSpPr>
-        <p:spPr>
-          <a:xfrm>
-            <a:off x="10451592" y="2633472"/>
-            <a:ext cx="640080" cy="237744"/>
-          </a:xfrm>
-          <a:prstGeom prst="rect">
-            <a:avLst/>
-          </a:prstGeom>
-          <a:noFill/>
-          <a:ln/>
-        </p:spPr>
-        <p:txBody>
-          <a:bodyPr wrap="square" lIns="0" tIns="0" rIns="0" bIns="0" rtlCol="0" anchor="ctr"/>
-          <a:lstStyle/>
-          <a:p>
-            <a:pPr algn="r" indent="0" marL="0">
-              <a:buNone/>
-            </a:pPr>
+        <p:txBody>
+          <a:bodyPr/>
+          <a:lstStyle/>
+          <a:p>
+            <a:endParaRPr lang="en-US"/>
+          </a:p>
+        </p:txBody>
+      </p:sp>
+      <p:sp>
+        <p:nvSpPr>
+          <p:cNvPr id="718" name="t718"/>
+          <p:cNvSpPr txBox="1"/>
+          <p:nvPr/>
+        </p:nvSpPr>
+        <p:spPr>
+          <a:xfrm>
+            <a:off x="5074920" y="4261104"/>
+            <a:ext cx="594360" cy="256032"/>
+          </a:xfrm>
+          <a:prstGeom prst="rect">
+            <a:avLst/>
+          </a:prstGeom>
+          <a:noFill/>
+        </p:spPr>
+        <p:txBody>
+          <a:bodyPr lIns="0" tIns="0" rIns="0" bIns="0"/>
+          <a:lstStyle/>
+          <a:p>
+            <a:pPr algn="r"/>
             <a:r>
               <a:rPr lang="en-US" sz="1000" dirty="0">
                 <a:solidFill>
+                  <a:srgbClr val="6B7280"/>
+                </a:solidFill>
+                <a:latin typeface="JetBrains Mono"/>
+              </a:rPr>
+              <a:t>05</a:t>
+            </a:r>
+          </a:p>
+        </p:txBody>
+      </p:sp>
+      <p:sp>
+        <p:nvSpPr>
+          <p:cNvPr id="719" name="t719"/>
+          <p:cNvSpPr txBox="1"/>
+          <p:nvPr/>
+        </p:nvSpPr>
+        <p:spPr>
+          <a:xfrm>
+            <a:off x="1078992" y="4279392"/>
+            <a:ext cx="3886200" cy="292608"/>
+          </a:xfrm>
+          <a:prstGeom prst="rect">
+            <a:avLst/>
+          </a:prstGeom>
+          <a:noFill/>
+        </p:spPr>
+        <p:txBody>
+          <a:bodyPr lIns="0" tIns="0" rIns="0" bIns="0"/>
+          <a:lstStyle/>
+          <a:p>
+            <a:pPr algn="l"/>
+            <a:r>
+              <a:rPr lang="en-US" sz="1400" b="1" dirty="0">
+                <a:solidFill>
                   <a:srgbClr val="3CCB8E"/>
                 </a:solidFill>
-                <a:latin typeface="JetBrains Mono" pitchFamily="34" charset="0"/>
-                <a:ea typeface="JetBrains Mono" pitchFamily="34" charset="-122"/>
-                <a:cs typeface="JetBrains Mono" pitchFamily="34" charset="-120"/>
-              </a:rPr>
-              <a:t>02</a:t>
-            </a:r>
-            <a:endParaRPr lang="en-US" sz="1000" dirty="0"/>
-          </a:p>
-        </p:txBody>
-      </p:sp>
-      <p:sp>
-        <p:nvSpPr>
-          <p:cNvPr id="15" name="Text 12"/>
-          <p:cNvSpPr/>
-          <p:nvPr/>
-        </p:nvSpPr>
-        <p:spPr>
-          <a:xfrm>
-            <a:off x="6652260" y="2724912"/>
-            <a:ext cx="3854196" cy="384048"/>
-          </a:xfrm>
-          <a:prstGeom prst="rect">
-            <a:avLst/>
-          </a:prstGeom>
-          <a:noFill/>
-          <a:ln/>
-        </p:spPr>
-        <p:txBody>
-          <a:bodyPr wrap="square" lIns="0" tIns="0" rIns="0" bIns="0" rtlCol="0" anchor="ctr"/>
-          <a:lstStyle/>
-          <a:p>
-            <a:pPr indent="0" marL="0">
-              <a:buNone/>
-            </a:pPr>
-            <a:r>
-              <a:rPr lang="en-US" sz="1800" b="1" dirty="0">
-                <a:solidFill>
-                  <a:srgbClr val="3CCB8E"/>
-                </a:solidFill>
-                <a:latin typeface="JetBrains Mono" pitchFamily="34" charset="0"/>
-                <a:ea typeface="JetBrains Mono" pitchFamily="34" charset="-122"/>
-                <a:cs typeface="JetBrains Mono" pitchFamily="34" charset="-120"/>
+                <a:latin typeface="Inter"/>
               </a:rPr>
               <a:t>identity-check.ts</a:t>
             </a:r>
-            <a:endParaRPr lang="en-US" sz="1800" dirty="0"/>
-          </a:p>
-        </p:txBody>
-      </p:sp>
-      <p:sp>
-        <p:nvSpPr>
-          <p:cNvPr id="16" name="Text 13"/>
-          <p:cNvSpPr/>
-          <p:nvPr/>
-        </p:nvSpPr>
-        <p:spPr>
-          <a:xfrm>
-            <a:off x="6652260" y="3236976"/>
-            <a:ext cx="4384548" cy="548640"/>
-          </a:xfrm>
-          <a:prstGeom prst="rect">
-            <a:avLst/>
-          </a:prstGeom>
-          <a:noFill/>
-          <a:ln/>
-        </p:spPr>
-        <p:txBody>
-          <a:bodyPr wrap="square" lIns="0" tIns="0" rIns="0" bIns="0" rtlCol="0" anchor="ctr"/>
-          <a:lstStyle/>
-          <a:p>
-            <a:pPr indent="0" marL="0">
-              <a:lnSpc>
-                <a:spcPts val="2000"/>
-              </a:lnSpc>
-              <a:buNone/>
-            </a:pPr>
-            <a:r>
-              <a:rPr lang="en-US" sz="1400" dirty="0">
+          </a:p>
+        </p:txBody>
+      </p:sp>
+      <p:sp>
+        <p:nvSpPr>
+          <p:cNvPr id="720" name="t720"/>
+          <p:cNvSpPr txBox="1"/>
+          <p:nvPr/>
+        </p:nvSpPr>
+        <p:spPr>
+          <a:xfrm>
+            <a:off x="1078992" y="4626864"/>
+            <a:ext cx="4608575" cy="402336"/>
+          </a:xfrm>
+          <a:prstGeom prst="rect">
+            <a:avLst/>
+          </a:prstGeom>
+          <a:noFill/>
+        </p:spPr>
+        <p:txBody>
+          <a:bodyPr lIns="0" tIns="0" rIns="0" bIns="0"/>
+          <a:lstStyle/>
+          <a:p>
+            <a:pPr algn="l"/>
+            <a:r>
+              <a:rPr lang="en-US" sz="1050" dirty="0">
                 <a:solidFill>
                   <a:srgbClr val="B9BECD"/>
                 </a:solidFill>
-                <a:latin typeface="Inter" pitchFamily="34" charset="0"/>
-                <a:ea typeface="Inter" pitchFamily="34" charset="-122"/>
-                <a:cs typeface="Inter" pitchFamily="34" charset="-120"/>
-              </a:rPr>
-              <a:t>42 lines. this is the session.</a:t>
-            </a:r>
-            <a:endParaRPr lang="en-US" sz="1400" dirty="0"/>
-          </a:p>
-        </p:txBody>
-      </p:sp>
-      <p:sp>
-        <p:nvSpPr>
-          <p:cNvPr id="17" name="Shape 14"/>
-          <p:cNvSpPr/>
-          <p:nvPr/>
-        </p:nvSpPr>
-        <p:spPr>
-          <a:xfrm>
-            <a:off x="822960" y="4279392"/>
-            <a:ext cx="5042916" cy="1572768"/>
+                <a:latin typeface="Inter"/>
+              </a:rPr>
+              <a:t>the heart of it — before paying: is this address really the wallet this agent registered on chain? mismatch, refuse</a:t>
+            </a:r>
+          </a:p>
+        </p:txBody>
+      </p:sp>
+      <p:sp>
+        <p:nvSpPr>
+          <p:cNvPr id="721" name="card721"/>
+          <p:cNvSpPr/>
+          <p:nvPr/>
+        </p:nvSpPr>
+        <p:spPr>
+          <a:xfrm>
+            <a:off x="6245352" y="4169664"/>
+            <a:ext cx="5120640" cy="914400"/>
           </a:xfrm>
           <a:prstGeom prst="roundRect">
             <a:avLst>
-              <a:gd name="adj" fmla="val 3488"/>
+              <a:gd name="adj" fmla="val 6500"/>
             </a:avLst>
           </a:prstGeom>
           <a:solidFill>
-            <a:srgbClr val="1C212B"/>
+            <a:srgbClr val="141821"/>
           </a:solidFill>
           <a:ln w="12700">
             <a:solidFill>
-              <a:srgbClr val="363C49"/>
+              <a:srgbClr val="2A2E37"/>
             </a:solidFill>
-            <a:prstDash val="solid"/>
           </a:ln>
         </p:spPr>
-      </p:sp>
-      <p:sp>
-        <p:nvSpPr>
-          <p:cNvPr id="18" name="Text 15"/>
-          <p:cNvSpPr/>
-          <p:nvPr/>
-        </p:nvSpPr>
-        <p:spPr>
-          <a:xfrm>
-            <a:off x="4951476" y="4517136"/>
-            <a:ext cx="640080" cy="237744"/>
-          </a:xfrm>
-          <a:prstGeom prst="rect">
-            <a:avLst/>
-          </a:prstGeom>
-          <a:noFill/>
-          <a:ln/>
-        </p:spPr>
-        <p:txBody>
-          <a:bodyPr wrap="square" lIns="0" tIns="0" rIns="0" bIns="0" rtlCol="0" anchor="ctr"/>
-          <a:lstStyle/>
-          <a:p>
-            <a:pPr algn="r" indent="0" marL="0">
-              <a:buNone/>
-            </a:pPr>
+        <p:txBody>
+          <a:bodyPr/>
+          <a:lstStyle/>
+          <a:p>
+            <a:endParaRPr lang="en-US"/>
+          </a:p>
+        </p:txBody>
+      </p:sp>
+      <p:sp>
+        <p:nvSpPr>
+          <p:cNvPr id="722" name="t722"/>
+          <p:cNvSpPr txBox="1"/>
+          <p:nvPr/>
+        </p:nvSpPr>
+        <p:spPr>
+          <a:xfrm>
+            <a:off x="10497312" y="4261104"/>
+            <a:ext cx="594360" cy="256032"/>
+          </a:xfrm>
+          <a:prstGeom prst="rect">
+            <a:avLst/>
+          </a:prstGeom>
+          <a:noFill/>
+        </p:spPr>
+        <p:txBody>
+          <a:bodyPr lIns="0" tIns="0" rIns="0" bIns="0"/>
+          <a:lstStyle/>
+          <a:p>
+            <a:pPr algn="r"/>
             <a:r>
               <a:rPr lang="en-US" sz="1000" dirty="0">
                 <a:solidFill>
-                  <a:srgbClr val="3A404D"/>
-                </a:solidFill>
-                <a:latin typeface="JetBrains Mono" pitchFamily="34" charset="0"/>
-                <a:ea typeface="JetBrains Mono" pitchFamily="34" charset="-122"/>
-                <a:cs typeface="JetBrains Mono" pitchFamily="34" charset="-120"/>
-              </a:rPr>
-              <a:t>03</a:t>
-            </a:r>
-            <a:endParaRPr lang="en-US" sz="1000" dirty="0"/>
-          </a:p>
-        </p:txBody>
-      </p:sp>
-      <p:sp>
-        <p:nvSpPr>
-          <p:cNvPr id="19" name="Text 16"/>
-          <p:cNvSpPr/>
-          <p:nvPr/>
-        </p:nvSpPr>
-        <p:spPr>
-          <a:xfrm>
-            <a:off x="1152144" y="4608576"/>
-            <a:ext cx="3854196" cy="384048"/>
-          </a:xfrm>
-          <a:prstGeom prst="rect">
-            <a:avLst/>
-          </a:prstGeom>
-          <a:noFill/>
-          <a:ln/>
-        </p:spPr>
-        <p:txBody>
-          <a:bodyPr wrap="square" lIns="0" tIns="0" rIns="0" bIns="0" rtlCol="0" anchor="ctr"/>
-          <a:lstStyle/>
-          <a:p>
-            <a:pPr indent="0" marL="0">
-              <a:buNone/>
-            </a:pPr>
-            <a:r>
-              <a:rPr lang="en-US" sz="1800" b="1" dirty="0">
+                  <a:srgbClr val="6B7280"/>
+                </a:solidFill>
+                <a:latin typeface="JetBrains Mono"/>
+              </a:rPr>
+              <a:t>06</a:t>
+            </a:r>
+          </a:p>
+        </p:txBody>
+      </p:sp>
+      <p:sp>
+        <p:nvSpPr>
+          <p:cNvPr id="723" name="t723"/>
+          <p:cNvSpPr txBox="1"/>
+          <p:nvPr/>
+        </p:nvSpPr>
+        <p:spPr>
+          <a:xfrm>
+            <a:off x="6501384" y="4279392"/>
+            <a:ext cx="3886200" cy="292608"/>
+          </a:xfrm>
+          <a:prstGeom prst="rect">
+            <a:avLst/>
+          </a:prstGeom>
+          <a:noFill/>
+        </p:spPr>
+        <p:txBody>
+          <a:bodyPr lIns="0" tIns="0" rIns="0" bIns="0"/>
+          <a:lstStyle/>
+          <a:p>
+            <a:pPr algn="l"/>
+            <a:r>
+              <a:rPr lang="en-US" sz="1400" b="1" dirty="0">
                 <a:solidFill>
                   <a:srgbClr val="FFFFFF"/>
                 </a:solidFill>
-                <a:latin typeface="JetBrains Mono" pitchFamily="34" charset="0"/>
-                <a:ea typeface="JetBrains Mono" pitchFamily="34" charset="-122"/>
-                <a:cs typeface="JetBrains Mono" pitchFamily="34" charset="-120"/>
-              </a:rPr>
-              <a:t>verify-proof.ts</a:t>
-            </a:r>
-            <a:endParaRPr lang="en-US" sz="1800" dirty="0"/>
-          </a:p>
-        </p:txBody>
-      </p:sp>
-      <p:sp>
-        <p:nvSpPr>
-          <p:cNvPr id="20" name="Text 17"/>
-          <p:cNvSpPr/>
-          <p:nvPr/>
-        </p:nvSpPr>
-        <p:spPr>
-          <a:xfrm>
-            <a:off x="1152144" y="5120640"/>
-            <a:ext cx="4384548" cy="548640"/>
-          </a:xfrm>
-          <a:prstGeom prst="rect">
-            <a:avLst/>
-          </a:prstGeom>
-          <a:noFill/>
-          <a:ln/>
-        </p:spPr>
-        <p:txBody>
-          <a:bodyPr wrap="square" lIns="0" tIns="0" rIns="0" bIns="0" rtlCol="0" anchor="ctr"/>
-          <a:lstStyle/>
-          <a:p>
-            <a:pPr indent="0" marL="0">
-              <a:lnSpc>
-                <a:spcPts val="2000"/>
-              </a:lnSpc>
-              <a:buNone/>
-            </a:pPr>
-            <a:r>
-              <a:rPr lang="en-US" sz="1400" dirty="0">
+                <a:latin typeface="Inter"/>
+              </a:rPr>
+              <a:t>pay.ts</a:t>
+            </a:r>
+          </a:p>
+        </p:txBody>
+      </p:sp>
+      <p:sp>
+        <p:nvSpPr>
+          <p:cNvPr id="724" name="t724"/>
+          <p:cNvSpPr txBox="1"/>
+          <p:nvPr/>
+        </p:nvSpPr>
+        <p:spPr>
+          <a:xfrm>
+            <a:off x="6501384" y="4626864"/>
+            <a:ext cx="4608575" cy="402336"/>
+          </a:xfrm>
+          <a:prstGeom prst="rect">
+            <a:avLst/>
+          </a:prstGeom>
+          <a:noFill/>
+        </p:spPr>
+        <p:txBody>
+          <a:bodyPr lIns="0" tIns="0" rIns="0" bIns="0"/>
+          <a:lstStyle/>
+          <a:p>
+            <a:pPr algn="l"/>
+            <a:r>
+              <a:rPr lang="en-US" sz="1050" dirty="0">
                 <a:solidFill>
                   <a:srgbClr val="B9BECD"/>
                 </a:solidFill>
-                <a:latin typeface="Inter" pitchFamily="34" charset="0"/>
-                <a:ea typeface="Inter" pitchFamily="34" charset="-122"/>
-                <a:cs typeface="Inter" pitchFamily="34" charset="-120"/>
-              </a:rPr>
-              <a:t>the seller's seven checks, all read-only</a:t>
-            </a:r>
-            <a:endParaRPr lang="en-US" sz="1400" dirty="0"/>
-          </a:p>
-        </p:txBody>
-      </p:sp>
-      <p:sp>
-        <p:nvSpPr>
-          <p:cNvPr id="21" name="Shape 18"/>
-          <p:cNvSpPr/>
-          <p:nvPr/>
-        </p:nvSpPr>
-        <p:spPr>
-          <a:xfrm>
-            <a:off x="6323076" y="4279392"/>
-            <a:ext cx="5042916" cy="1572768"/>
+                <a:latin typeface="Inter"/>
+              </a:rPr>
+              <a:t>the payment — pays from the agent's own wallet, signs a claim naming that transaction, retries with proof attached</a:t>
+            </a:r>
+          </a:p>
+        </p:txBody>
+      </p:sp>
+      <p:sp>
+        <p:nvSpPr>
+          <p:cNvPr id="725" name="card725"/>
+          <p:cNvSpPr/>
+          <p:nvPr/>
+        </p:nvSpPr>
+        <p:spPr>
+          <a:xfrm>
+            <a:off x="822960" y="5193792"/>
+            <a:ext cx="10543032" cy="914400"/>
           </a:xfrm>
           <a:prstGeom prst="roundRect">
             <a:avLst>
-              <a:gd name="adj" fmla="val 3488"/>
+              <a:gd name="adj" fmla="val 6500"/>
             </a:avLst>
           </a:prstGeom>
           <a:solidFill>
-            <a:srgbClr val="1C212B"/>
+            <a:srgbClr val="141821"/>
           </a:solidFill>
           <a:ln w="12700">
             <a:solidFill>
-              <a:srgbClr val="363C49"/>
+              <a:srgbClr val="2A2E37"/>
             </a:solidFill>
-            <a:prstDash val="solid"/>
           </a:ln>
         </p:spPr>
-      </p:sp>
-      <p:sp>
-        <p:nvSpPr>
-          <p:cNvPr id="22" name="Text 19"/>
-          <p:cNvSpPr/>
-          <p:nvPr/>
-        </p:nvSpPr>
-        <p:spPr>
-          <a:xfrm>
-            <a:off x="10451592" y="4517136"/>
-            <a:ext cx="640080" cy="237744"/>
-          </a:xfrm>
-          <a:prstGeom prst="rect">
-            <a:avLst/>
-          </a:prstGeom>
-          <a:noFill/>
-          <a:ln/>
-        </p:spPr>
-        <p:txBody>
-          <a:bodyPr wrap="square" lIns="0" tIns="0" rIns="0" bIns="0" rtlCol="0" anchor="ctr"/>
-          <a:lstStyle/>
-          <a:p>
-            <a:pPr algn="r" indent="0" marL="0">
-              <a:buNone/>
-            </a:pPr>
+        <p:txBody>
+          <a:bodyPr/>
+          <a:lstStyle/>
+          <a:p>
+            <a:endParaRPr lang="en-US"/>
+          </a:p>
+        </p:txBody>
+      </p:sp>
+      <p:sp>
+        <p:nvSpPr>
+          <p:cNvPr id="726" name="t726"/>
+          <p:cNvSpPr txBox="1"/>
+          <p:nvPr/>
+        </p:nvSpPr>
+        <p:spPr>
+          <a:xfrm>
+            <a:off x="10497312" y="5285231"/>
+            <a:ext cx="594360" cy="256032"/>
+          </a:xfrm>
+          <a:prstGeom prst="rect">
+            <a:avLst/>
+          </a:prstGeom>
+          <a:noFill/>
+        </p:spPr>
+        <p:txBody>
+          <a:bodyPr lIns="0" tIns="0" rIns="0" bIns="0"/>
+          <a:lstStyle/>
+          <a:p>
+            <a:pPr algn="r"/>
             <a:r>
               <a:rPr lang="en-US" sz="1000" dirty="0">
                 <a:solidFill>
-                  <a:srgbClr val="3A404D"/>
-                </a:solidFill>
-                <a:latin typeface="JetBrains Mono" pitchFamily="34" charset="0"/>
-                <a:ea typeface="JetBrains Mono" pitchFamily="34" charset="-122"/>
-                <a:cs typeface="JetBrains Mono" pitchFamily="34" charset="-120"/>
-              </a:rPr>
-              <a:t>04</a:t>
-            </a:r>
-            <a:endParaRPr lang="en-US" sz="1000" dirty="0"/>
-          </a:p>
-        </p:txBody>
-      </p:sp>
-      <p:sp>
-        <p:nvSpPr>
-          <p:cNvPr id="23" name="Text 20"/>
-          <p:cNvSpPr/>
-          <p:nvPr/>
-        </p:nvSpPr>
-        <p:spPr>
-          <a:xfrm>
-            <a:off x="6652260" y="4608576"/>
-            <a:ext cx="3854196" cy="384048"/>
-          </a:xfrm>
-          <a:prstGeom prst="rect">
-            <a:avLst/>
-          </a:prstGeom>
-          <a:noFill/>
-          <a:ln/>
-        </p:spPr>
-        <p:txBody>
-          <a:bodyPr wrap="square" lIns="0" tIns="0" rIns="0" bIns="0" rtlCol="0" anchor="ctr"/>
-          <a:lstStyle/>
-          <a:p>
-            <a:pPr indent="0" marL="0">
-              <a:buNone/>
-            </a:pPr>
-            <a:r>
-              <a:rPr lang="en-US" sz="1800" b="1" dirty="0">
+                  <a:srgbClr val="6B7280"/>
+                </a:solidFill>
+                <a:latin typeface="JetBrains Mono"/>
+              </a:rPr>
+              <a:t>07</a:t>
+            </a:r>
+          </a:p>
+        </p:txBody>
+      </p:sp>
+      <p:sp>
+        <p:nvSpPr>
+          <p:cNvPr id="727" name="t727"/>
+          <p:cNvSpPr txBox="1"/>
+          <p:nvPr/>
+        </p:nvSpPr>
+        <p:spPr>
+          <a:xfrm>
+            <a:off x="1078992" y="5303520"/>
+            <a:ext cx="9308592" cy="292608"/>
+          </a:xfrm>
+          <a:prstGeom prst="rect">
+            <a:avLst/>
+          </a:prstGeom>
+          <a:noFill/>
+        </p:spPr>
+        <p:txBody>
+          <a:bodyPr lIns="0" tIns="0" rIns="0" bIns="0"/>
+          <a:lstStyle/>
+          <a:p>
+            <a:pPr algn="l"/>
+            <a:r>
+              <a:rPr lang="en-US" sz="1400" b="1" dirty="0">
                 <a:solidFill>
                   <a:srgbClr val="FFFFFF"/>
                 </a:solidFill>
-                <a:latin typeface="JetBrains Mono" pitchFamily="34" charset="0"/>
-                <a:ea typeface="JetBrains Mono" pitchFamily="34" charset="-122"/>
-                <a:cs typeface="JetBrains Mono" pitchFamily="34" charset="-120"/>
-              </a:rPr>
-              <a:t>pricing.ts + worth.ts</a:t>
-            </a:r>
-            <a:endParaRPr lang="en-US" sz="1800" dirty="0"/>
-          </a:p>
-        </p:txBody>
-      </p:sp>
-      <p:sp>
-        <p:nvSpPr>
-          <p:cNvPr id="24" name="Text 21"/>
-          <p:cNvSpPr/>
-          <p:nvPr/>
-        </p:nvSpPr>
-        <p:spPr>
-          <a:xfrm>
-            <a:off x="6652260" y="5120640"/>
-            <a:ext cx="4384548" cy="548640"/>
-          </a:xfrm>
-          <a:prstGeom prst="rect">
-            <a:avLst/>
-          </a:prstGeom>
-          <a:noFill/>
-          <a:ln/>
-        </p:spPr>
-        <p:txBody>
-          <a:bodyPr wrap="square" lIns="0" tIns="0" rIns="0" bIns="0" rtlCol="0" anchor="ctr"/>
-          <a:lstStyle/>
-          <a:p>
-            <a:pPr indent="0" marL="0">
-              <a:lnSpc>
-                <a:spcPts val="2000"/>
-              </a:lnSpc>
-              <a:buNone/>
-            </a:pPr>
-            <a:r>
-              <a:rPr lang="en-US" sz="1400" dirty="0">
+                <a:latin typeface="Inter"/>
+              </a:rPr>
+              <a:t>verify-proof.ts</a:t>
+            </a:r>
+          </a:p>
+        </p:txBody>
+      </p:sp>
+      <p:sp>
+        <p:nvSpPr>
+          <p:cNvPr id="728" name="t728"/>
+          <p:cNvSpPr txBox="1"/>
+          <p:nvPr/>
+        </p:nvSpPr>
+        <p:spPr>
+          <a:xfrm>
+            <a:off x="1078992" y="5650992"/>
+            <a:ext cx="10030967" cy="402336"/>
+          </a:xfrm>
+          <a:prstGeom prst="rect">
+            <a:avLst/>
+          </a:prstGeom>
+          <a:noFill/>
+        </p:spPr>
+        <p:txBody>
+          <a:bodyPr lIns="0" tIns="0" rIns="0" bIns="0"/>
+          <a:lstStyle/>
+          <a:p>
+            <a:pPr algn="l"/>
+            <a:r>
+              <a:rPr lang="en-US" sz="1050" dirty="0">
                 <a:solidFill>
                   <a:srgbClr val="B9BECD"/>
                 </a:solidFill>
-                <a:latin typeface="Inter" pitchFamily="34" charset="0"/>
-                <a:ea typeface="Inter" pitchFamily="34" charset="-122"/>
-                <a:cs typeface="Inter" pitchFamily="34" charset="-120"/>
-              </a:rPr>
-              <a:t>what each agent decides — and what it is not allowed to</a:t>
-            </a:r>
-            <a:endParaRPr lang="en-US" sz="1400" dirty="0"/>
+                <a:latin typeface="Inter"/>
+              </a:rPr>
+              <a:t>the seller's seven checks — signature, payer identity, amount, expiry, replay, and the transfer itself, read off the chain rather than taken on the buyer's word</a:t>
+            </a:r>
           </a:p>
         </p:txBody>
       </p:sp>
